--- a/03-build/pptx/C4_U3_docente.pptx
+++ b/03-build/pptx/C4_U3_docente.pptx
@@ -12731,7 +12731,7 @@
         <p:spPr>
           <a:xfrm>
             <a:off x="7498079" y="1417320"/>
-            <a:ext cx="4206240" cy="3108960"/>
+            <a:ext cx="4206240" cy="2240280"/>
           </a:xfrm>
           <a:prstGeom prst="roundRect">
             <a:avLst>
@@ -12785,8 +12785,8 @@
         </p:nvSpPr>
         <p:spPr>
           <a:xfrm>
-            <a:off x="7726679" y="1600200"/>
-            <a:ext cx="3749039" cy="2834640"/>
+            <a:off x="7726679" y="1572768"/>
+            <a:ext cx="3749039" cy="2011680"/>
           </a:xfrm>
           <a:prstGeom prst="rect">
             <a:avLst/>
@@ -12811,7 +12811,7 @@
               </a:spcAft>
             </a:pPr>
             <a:r>
-              <a:rPr sz="1400" b="1" i="0">
+              <a:rPr sz="1300" b="1" i="0">
                 <a:solidFill>
                   <a:srgbClr val="A8323B"/>
                 </a:solidFill>
@@ -12833,13 +12833,13 @@
               </a:spcAft>
             </a:pPr>
             <a:r>
-              <a:rPr sz="1250" b="0" i="0">
+              <a:rPr sz="1150" b="0" i="0">
                 <a:solidFill>
                   <a:srgbClr val="20242E"/>
                 </a:solidFill>
                 <a:latin typeface="Inter"/>
               </a:rPr>
-              <a:t>¿De dónde eres? · ¿De qué país?</a:t>
+              <a:t>¿De dónde eres? · Soy de + país</a:t>
             </a:r>
           </a:p>
           <a:p>
@@ -12855,13 +12855,13 @@
               </a:spcAft>
             </a:pPr>
             <a:r>
-              <a:rPr sz="1250" b="0" i="0">
+              <a:rPr sz="1150" b="0" i="0">
                 <a:solidFill>
                   <a:srgbClr val="20242E"/>
                 </a:solidFill>
                 <a:latin typeface="Inter"/>
               </a:rPr>
-              <a:t>Soy de + país · Soy de Argelia</a:t>
+              <a:t>argelino ♂ · argelina ♀</a:t>
             </a:r>
           </a:p>
           <a:p>
@@ -12877,13 +12877,13 @@
               </a:spcAft>
             </a:pPr>
             <a:r>
-              <a:rPr sz="1250" b="0" i="0">
+              <a:rPr sz="1150" b="0" i="0">
                 <a:solidFill>
                   <a:srgbClr val="20242E"/>
                 </a:solidFill>
                 <a:latin typeface="Inter"/>
               </a:rPr>
-              <a:t>argelino ♂ · argelina ♀</a:t>
+              <a:t>Hablo español · un poco</a:t>
             </a:r>
           </a:p>
           <a:p>
@@ -12899,34 +12899,12 @@
               </a:spcAft>
             </a:pPr>
             <a:r>
-              <a:rPr sz="1250" b="0" i="0">
+              <a:rPr sz="1150" b="0" i="0">
                 <a:solidFill>
                   <a:srgbClr val="20242E"/>
                 </a:solidFill>
                 <a:latin typeface="Inter"/>
               </a:rPr>
-              <a:t>Hablo español · un poco · bastante bien</a:t>
-            </a:r>
-          </a:p>
-          <a:p>
-            <a:pPr algn="l">
-              <a:lnSpc>
-                <a:spcPct val="106000"/>
-              </a:lnSpc>
-              <a:spcBef>
-                <a:spcPts val="0"/>
-              </a:spcBef>
-              <a:spcAft>
-                <a:spcPts val="200"/>
-              </a:spcAft>
-            </a:pPr>
-            <a:r>
-              <a:rPr sz="1250" b="0" i="0">
-                <a:solidFill>
-                  <a:srgbClr val="20242E"/>
-                </a:solidFill>
-                <a:latin typeface="Inter"/>
-              </a:rPr>
               <a:t>árabe · francés · español · inglés</a:t>
             </a:r>
           </a:p>
@@ -12934,69 +12912,14 @@
       </p:sp>
       <p:sp>
         <p:nvSpPr>
-          <p:cNvPr id="28" name="Rounded Rectangle 27"/>
-          <p:cNvSpPr/>
-          <p:nvPr/>
-        </p:nvSpPr>
-        <p:spPr>
-          <a:xfrm>
-            <a:off x="7498079" y="4663440"/>
-            <a:ext cx="4206240" cy="1234440"/>
-          </a:xfrm>
-          <a:prstGeom prst="roundRect">
-            <a:avLst>
-              <a:gd name="adj" fmla="val 5500"/>
-            </a:avLst>
-          </a:prstGeom>
-          <a:solidFill>
-            <a:srgbClr val="FFFFFF"/>
-          </a:solidFill>
-          <a:ln w="15240">
-            <a:solidFill>
-              <a:srgbClr val="E4E3DE"/>
-            </a:solidFill>
-          </a:ln>
-          <a:effectLst/>
-          <a:effectLst>
-            <a:outerShdw blurRad="90000" dist="38000" dir="5400000" rotWithShape="0">
-              <a:srgbClr val="20242E">
-                <a:alpha val="22000"/>
-              </a:srgbClr>
-            </a:outerShdw>
-          </a:effectLst>
-        </p:spPr>
-        <p:style>
-          <a:lnRef idx="1">
-            <a:schemeClr val="accent1"/>
-          </a:lnRef>
-          <a:fillRef idx="3">
-            <a:schemeClr val="accent1"/>
-          </a:fillRef>
-          <a:effectRef idx="2">
-            <a:schemeClr val="accent1"/>
-          </a:effectRef>
-          <a:fontRef idx="minor">
-            <a:schemeClr val="lt1"/>
-          </a:fontRef>
-        </p:style>
-        <p:txBody>
-          <a:bodyPr rtlCol="0" anchor="ctr"/>
-          <a:lstStyle/>
-          <a:p>
-            <a:pPr algn="ctr"/>
-          </a:p>
-        </p:txBody>
-      </p:sp>
-      <p:sp>
-        <p:nvSpPr>
-          <p:cNvPr id="29" name="TextBox 28"/>
+          <p:cNvPr id="28" name="TextBox 27"/>
           <p:cNvSpPr txBox="1"/>
           <p:nvPr/>
         </p:nvSpPr>
         <p:spPr>
           <a:xfrm>
-            <a:off x="7726679" y="4800600"/>
-            <a:ext cx="3749039" cy="1005840"/>
+            <a:off x="7498079" y="3767328"/>
+            <a:ext cx="4206240" cy="274320"/>
           </a:xfrm>
           <a:prstGeom prst="rect">
             <a:avLst/>
@@ -13021,39 +12944,50 @@
               </a:spcAft>
             </a:pPr>
             <a:r>
-              <a:rPr sz="1200" b="1" i="0">
+              <a:rPr sz="1100" b="1" i="0">
                 <a:solidFill>
                   <a:srgbClr val="A8323B"/>
                 </a:solidFill>
                 <a:latin typeface="Bricolage Grotesque"/>
               </a:rPr>
-              <a:t>🎬 Vídeo online · Episodio 3</a:t>
-            </a:r>
-          </a:p>
-          <a:p>
-            <a:pPr algn="l">
-              <a:lnSpc>
-                <a:spcPct val="106000"/>
-              </a:lnSpc>
-              <a:spcBef>
-                <a:spcPts val="0"/>
-              </a:spcBef>
-              <a:spcAft>
-                <a:spcPts val="200"/>
-              </a:spcAft>
-            </a:pPr>
-            <a:r>
-              <a:rPr sz="1050" b="0" i="0">
-                <a:solidFill>
-                  <a:srgbClr val="6A6E78"/>
-                </a:solidFill>
-                <a:latin typeface="Inter"/>
-              </a:rPr>
-              <a:t>Scan de QR op de cursus of open de digitale hub → tabblad Escucha. Fallback: youtu.be/62GTD0QXbiI</a:t>
-            </a:r>
-          </a:p>
-        </p:txBody>
-      </p:sp>
+              <a:t>🎬 Sitcom · Episodio 3 — klik om af te spelen</a:t>
+            </a:r>
+          </a:p>
+        </p:txBody>
+      </p:sp>
+      <p:pic>
+        <p:nvPicPr>
+          <p:cNvPr id="29" name="Picture 28" descr="video_poster_U3.png">
+            <a:hlinkClick r:id="" action="ppaction://media"/>
+          </p:cNvPr>
+          <p:cNvPicPr>
+            <a:picLocks noChangeAspect="1"/>
+          </p:cNvPicPr>
+          <p:nvPr>
+            <a:videoFile r:link="rId3"/>
+            <p:extLst>
+              <p:ext uri="{DAA4B4D4-6D71-4841-9C94-3DE7FCFB9230}">
+                <p14:media xmlns:p14="http://schemas.microsoft.com/office/powerpoint/2010/main" r:embed="rId4"/>
+              </p:ext>
+            </p:extLst>
+          </p:nvPr>
+        </p:nvPicPr>
+        <p:blipFill>
+          <a:blip r:embed="rId2"/>
+          <a:stretch>
+            <a:fillRect/>
+          </a:stretch>
+        </p:blipFill>
+        <p:spPr>
+          <a:xfrm>
+            <a:off x="7498079" y="4069080"/>
+            <a:ext cx="4206240" cy="2331720"/>
+          </a:xfrm>
+          <a:prstGeom prst="rect">
+            <a:avLst/>
+          </a:prstGeom>
+        </p:spPr>
+      </p:pic>
       <p:sp>
         <p:nvSpPr>
           <p:cNvPr id="30" name="Rectangle 29"/>

--- a/03-build/pptx/C4_U3_docente.pptx
+++ b/03-build/pptx/C4_U3_docente.pptx
@@ -19,6 +19,7 @@
     <p:sldId id="267" r:id="rId19"/>
     <p:sldId id="268" r:id="rId20"/>
     <p:sldId id="269" r:id="rId21"/>
+    <p:sldId id="270" r:id="rId22"/>
   </p:sldIdLst>
   <p:sldSz cx="12191695" cy="6858000" type="screen4x3"/>
   <p:notesSz cx="6858000" cy="9144000"/>
@@ -7970,7 +7971,7 @@
         <p:spPr>
           <a:xfrm>
             <a:off x="502920" y="182880"/>
-            <a:ext cx="623620" cy="292608"/>
+            <a:ext cx="875995" cy="292608"/>
           </a:xfrm>
           <a:prstGeom prst="roundRect">
             <a:avLst>
@@ -8011,7 +8012,7 @@
                 </a:solidFill>
                 <a:latin typeface="Inter"/>
               </a:rPr>
-              <a:t>REPASO</a:t>
+              <a:t>FUNCIONES</a:t>
             </a:r>
           </a:p>
         </p:txBody>
@@ -8056,7 +8057,7 @@
                 </a:solidFill>
                 <a:latin typeface="Bricolage Grotesque"/>
               </a:rPr>
-              <a:t>Lo esencial de un vistazo</a:t>
+              <a:t>Mis funciones comunicativas</a:t>
             </a:r>
           </a:p>
         </p:txBody>
@@ -8101,21 +8102,75 @@
                 </a:solidFill>
                 <a:latin typeface="Inter"/>
               </a:rPr>
-              <a:t>Wat je nu kunt — semáforo</a:t>
-            </a:r>
-          </a:p>
-        </p:txBody>
-      </p:sp>
-      <p:sp>
-        <p:nvSpPr>
-          <p:cNvPr id="8" name="Rounded Rectangle 7"/>
+              <a:t>Lo que ya sé hacer — crece cada unidad</a:t>
+            </a:r>
+          </a:p>
+        </p:txBody>
+      </p:sp>
+      <p:sp>
+        <p:nvSpPr>
+          <p:cNvPr id="8" name="TextBox 7"/>
+          <p:cNvSpPr txBox="1"/>
+          <p:nvPr/>
+        </p:nvSpPr>
+        <p:spPr>
+          <a:xfrm>
+            <a:off x="548640" y="1298448"/>
+            <a:ext cx="11155680" cy="320040"/>
+          </a:xfrm>
+          <a:prstGeom prst="rect">
+            <a:avLst/>
+          </a:prstGeom>
+          <a:noFill/>
+        </p:spPr>
+        <p:txBody>
+          <a:bodyPr wrap="square" anchor="t" lIns="38100" rIns="38100" tIns="25400" bIns="25400">
+            <a:spAutoFit/>
+          </a:bodyPr>
+          <a:lstStyle/>
+          <a:p>
+            <a:pPr algn="l">
+              <a:lnSpc>
+                <a:spcPct val="106000"/>
+              </a:lnSpc>
+              <a:spcBef>
+                <a:spcPts val="0"/>
+              </a:spcBef>
+              <a:spcAft>
+                <a:spcPts val="200"/>
+              </a:spcAft>
+            </a:pPr>
+            <a:r>
+              <a:rPr sz="1300" b="1" i="0">
+                <a:solidFill>
+                  <a:srgbClr val="A8323B"/>
+                </a:solidFill>
+                <a:latin typeface="Bricolage Grotesque"/>
+              </a:rPr>
+              <a:t>Mi repertorio: 8 / 8 funciones — </a:t>
+            </a:r>
+            <a:r>
+              <a:rPr sz="1200" b="0" i="0">
+                <a:solidFill>
+                  <a:srgbClr val="6A6E78"/>
+                </a:solidFill>
+                <a:latin typeface="Inter"/>
+              </a:rPr>
+              <a:t>no solo palabras: lo que puedo HACER con el español.</a:t>
+            </a:r>
+          </a:p>
+        </p:txBody>
+      </p:sp>
+      <p:sp>
+        <p:nvSpPr>
+          <p:cNvPr id="9" name="Rounded Rectangle 8"/>
           <p:cNvSpPr/>
           <p:nvPr/>
         </p:nvSpPr>
         <p:spPr>
           <a:xfrm>
-            <a:off x="502920" y="1554480"/>
-            <a:ext cx="6949440" cy="4023360"/>
+            <a:off x="502920" y="1691640"/>
+            <a:ext cx="5394960" cy="1060704"/>
           </a:xfrm>
           <a:prstGeom prst="roundRect">
             <a:avLst>
@@ -8163,14 +8218,14 @@
       </p:sp>
       <p:sp>
         <p:nvSpPr>
-          <p:cNvPr id="9" name="TextBox 8"/>
+          <p:cNvPr id="10" name="TextBox 9"/>
           <p:cNvSpPr txBox="1"/>
           <p:nvPr/>
         </p:nvSpPr>
         <p:spPr>
           <a:xfrm>
-            <a:off x="777240" y="1737360"/>
-            <a:ext cx="6492240" cy="3657600"/>
+            <a:off x="704088" y="1801368"/>
+            <a:ext cx="4992624" cy="365760"/>
           </a:xfrm>
           <a:prstGeom prst="rect">
             <a:avLst/>
@@ -8195,15 +8250,47 @@
               </a:spcAft>
             </a:pPr>
             <a:r>
-              <a:rPr sz="1400" b="1" i="0">
+              <a:rPr sz="1250" b="1" i="0">
+                <a:solidFill>
+                  <a:srgbClr val="20242E"/>
+                </a:solidFill>
+                <a:latin typeface="Bricolage Grotesque"/>
+              </a:rPr>
+              <a:t>Saludar y despedirse</a:t>
+            </a:r>
+            <a:r>
+              <a:rPr sz="900" b="1" i="0">
                 <a:solidFill>
                   <a:srgbClr val="A8323B"/>
                 </a:solidFill>
-                <a:latin typeface="Bricolage Grotesque"/>
-              </a:rPr>
-              <a:t>Zo vraag &amp; zeg je het origen</a:t>
-            </a:r>
-          </a:p>
+                <a:latin typeface="Inter"/>
+              </a:rPr>
+              <a:t/>
+            </a:r>
+          </a:p>
+        </p:txBody>
+      </p:sp>
+      <p:sp>
+        <p:nvSpPr>
+          <p:cNvPr id="11" name="TextBox 10"/>
+          <p:cNvSpPr txBox="1"/>
+          <p:nvPr/>
+        </p:nvSpPr>
+        <p:spPr>
+          <a:xfrm>
+            <a:off x="704088" y="2194560"/>
+            <a:ext cx="4992624" cy="502920"/>
+          </a:xfrm>
+          <a:prstGeom prst="rect">
+            <a:avLst/>
+          </a:prstGeom>
+          <a:noFill/>
+        </p:spPr>
+        <p:txBody>
+          <a:bodyPr wrap="square" anchor="t" lIns="38100" rIns="38100" tIns="25400" bIns="25400">
+            <a:spAutoFit/>
+          </a:bodyPr>
+          <a:lstStyle/>
           <a:p>
             <a:pPr algn="l">
               <a:lnSpc>
@@ -8217,159 +8304,27 @@
               </a:spcAft>
             </a:pPr>
             <a:r>
-              <a:rPr sz="1400" b="0" i="0">
-                <a:solidFill>
-                  <a:srgbClr val="20242E"/>
-                </a:solidFill>
-                <a:latin typeface="Inter"/>
-              </a:rPr>
-              <a:t>¿De dónde eres? → Soy de + país (Soy de Bélgica)</a:t>
-            </a:r>
-          </a:p>
-          <a:p>
-            <a:pPr algn="l">
-              <a:lnSpc>
-                <a:spcPct val="106000"/>
-              </a:lnSpc>
-              <a:spcBef>
-                <a:spcPts val="0"/>
-              </a:spcBef>
-              <a:spcAft>
-                <a:spcPts val="200"/>
-              </a:spcAft>
-            </a:pPr>
-            <a:r>
-              <a:rPr sz="1300" b="0" i="0">
-                <a:solidFill>
-                  <a:srgbClr val="20242E"/>
-                </a:solidFill>
-                <a:latin typeface="Inter"/>
-              </a:rPr>
-              <a:t>Land = met de · nationaliteit = zónder de (soy belga)</a:t>
-            </a:r>
-          </a:p>
-          <a:p>
-            <a:pPr algn="l">
-              <a:lnSpc>
-                <a:spcPct val="106000"/>
-              </a:lnSpc>
-              <a:spcBef>
-                <a:spcPts val="0"/>
-              </a:spcBef>
-              <a:spcAft>
-                <a:spcPts val="200"/>
-              </a:spcAft>
-            </a:pPr>
-            <a:r>
-              <a:rPr sz="600" b="0" i="0">
-                <a:solidFill>
-                  <a:srgbClr val="20242E"/>
-                </a:solidFill>
-                <a:latin typeface="Inter"/>
-              </a:rPr>
-              <a:t/>
-            </a:r>
-          </a:p>
-          <a:p>
-            <a:pPr algn="l">
-              <a:lnSpc>
-                <a:spcPct val="106000"/>
-              </a:lnSpc>
-              <a:spcBef>
-                <a:spcPts val="0"/>
-              </a:spcBef>
-              <a:spcAft>
-                <a:spcPts val="200"/>
-              </a:spcAft>
-            </a:pPr>
-            <a:r>
-              <a:rPr sz="1400" b="1" i="0">
-                <a:solidFill>
-                  <a:srgbClr val="A8323B"/>
-                </a:solidFill>
-                <a:latin typeface="Bricolage Grotesque"/>
-              </a:rPr>
-              <a:t>Nationaliteit &amp; talen</a:t>
-            </a:r>
-          </a:p>
-          <a:p>
-            <a:pPr algn="l">
-              <a:lnSpc>
-                <a:spcPct val="106000"/>
-              </a:lnSpc>
-              <a:spcBef>
-                <a:spcPts val="0"/>
-              </a:spcBef>
-              <a:spcAft>
-                <a:spcPts val="200"/>
-              </a:spcAft>
-            </a:pPr>
-            <a:r>
-              <a:rPr sz="1300" b="0" i="0">
-                <a:solidFill>
-                  <a:srgbClr val="20242E"/>
-                </a:solidFill>
-                <a:latin typeface="Inter"/>
-              </a:rPr>
-              <a:t>mexicano ♂ / mexicana ♀ · met kleine letter</a:t>
-            </a:r>
-          </a:p>
-          <a:p>
-            <a:pPr algn="l">
-              <a:lnSpc>
-                <a:spcPct val="106000"/>
-              </a:lnSpc>
-              <a:spcBef>
-                <a:spcPts val="0"/>
-              </a:spcBef>
-              <a:spcAft>
-                <a:spcPts val="200"/>
-              </a:spcAft>
-            </a:pPr>
-            <a:r>
-              <a:rPr sz="1300" b="0" i="0">
-                <a:solidFill>
-                  <a:srgbClr val="20242E"/>
-                </a:solidFill>
-                <a:latin typeface="Inter"/>
-              </a:rPr>
-              <a:t>Hablo español, neerlandés, francés…</a:t>
-            </a:r>
-          </a:p>
-          <a:p>
-            <a:pPr algn="l">
-              <a:lnSpc>
-                <a:spcPct val="106000"/>
-              </a:lnSpc>
-              <a:spcBef>
-                <a:spcPts val="0"/>
-              </a:spcBef>
-              <a:spcAft>
-                <a:spcPts val="200"/>
-              </a:spcAft>
-            </a:pPr>
-            <a:r>
-              <a:rPr sz="1300" b="0" i="0">
-                <a:solidFill>
-                  <a:srgbClr val="20242E"/>
-                </a:solidFill>
-                <a:latin typeface="Inter"/>
-              </a:rPr>
-              <a:t>belga · marroquí blijven gelijk (♂ = ♀)</a:t>
-            </a:r>
-          </a:p>
-        </p:txBody>
-      </p:sp>
-      <p:sp>
-        <p:nvSpPr>
-          <p:cNvPr id="10" name="Rounded Rectangle 9"/>
+              <a:rPr sz="900" b="0" i="0">
+                <a:solidFill>
+                  <a:srgbClr val="6A6E78"/>
+                </a:solidFill>
+                <a:latin typeface="Inter"/>
+              </a:rPr>
+              <a:t>Hola · Adiós · Hasta luego · Buenos días / tardes / noches · ¡Buenas! · Hasta mañana · ¡Nos vemos!</a:t>
+            </a:r>
+          </a:p>
+        </p:txBody>
+      </p:sp>
+      <p:sp>
+        <p:nvSpPr>
+          <p:cNvPr id="12" name="Rounded Rectangle 11"/>
           <p:cNvSpPr/>
           <p:nvPr/>
         </p:nvSpPr>
         <p:spPr>
           <a:xfrm>
-            <a:off x="7680960" y="1554480"/>
-            <a:ext cx="4023360" cy="4023360"/>
+            <a:off x="6263640" y="1691640"/>
+            <a:ext cx="5394960" cy="1060704"/>
           </a:xfrm>
           <a:prstGeom prst="roundRect">
             <a:avLst>
@@ -8417,14 +8372,14 @@
       </p:sp>
       <p:sp>
         <p:nvSpPr>
-          <p:cNvPr id="11" name="TextBox 10"/>
+          <p:cNvPr id="13" name="TextBox 12"/>
           <p:cNvSpPr txBox="1"/>
           <p:nvPr/>
         </p:nvSpPr>
         <p:spPr>
           <a:xfrm>
-            <a:off x="7909560" y="1737360"/>
-            <a:ext cx="3566160" cy="457200"/>
+            <a:off x="6464808" y="1801368"/>
+            <a:ext cx="4992624" cy="365760"/>
           </a:xfrm>
           <a:prstGeom prst="rect">
             <a:avLst/>
@@ -8449,27 +8404,36 @@
               </a:spcAft>
             </a:pPr>
             <a:r>
-              <a:rPr sz="1300" b="1" i="0">
+              <a:rPr sz="1250" b="1" i="0">
+                <a:solidFill>
+                  <a:srgbClr val="20242E"/>
+                </a:solidFill>
+                <a:latin typeface="Bricolage Grotesque"/>
+              </a:rPr>
+              <a:t>Presentarse (decir quién soy)</a:t>
+            </a:r>
+            <a:r>
+              <a:rPr sz="900" b="1" i="0">
                 <a:solidFill>
                   <a:srgbClr val="A8323B"/>
                 </a:solidFill>
-                <a:latin typeface="Bricolage Grotesque"/>
-              </a:rPr>
-              <a:t>Puedo… · Ik kan…</a:t>
-            </a:r>
-          </a:p>
-        </p:txBody>
-      </p:sp>
-      <p:sp>
-        <p:nvSpPr>
-          <p:cNvPr id="12" name="TextBox 11"/>
+                <a:latin typeface="Inter"/>
+              </a:rPr>
+              <a:t>  ▲ nivel+</a:t>
+            </a:r>
+          </a:p>
+        </p:txBody>
+      </p:sp>
+      <p:sp>
+        <p:nvSpPr>
+          <p:cNvPr id="14" name="TextBox 13"/>
           <p:cNvSpPr txBox="1"/>
           <p:nvPr/>
         </p:nvSpPr>
         <p:spPr>
           <a:xfrm>
-            <a:off x="7909560" y="2331720"/>
-            <a:ext cx="3566160" cy="640080"/>
+            <a:off x="6464808" y="2194560"/>
+            <a:ext cx="4992624" cy="502920"/>
           </a:xfrm>
           <a:prstGeom prst="rect">
             <a:avLst/>
@@ -8494,36 +8458,82 @@
               </a:spcAft>
             </a:pPr>
             <a:r>
-              <a:rPr sz="1200" b="0" i="0">
-                <a:solidFill>
-                  <a:srgbClr val="20242E"/>
-                </a:solidFill>
-                <a:latin typeface="Inter"/>
-              </a:rPr>
-              <a:t>🟢🟡🔴  </a:t>
-            </a:r>
-            <a:r>
-              <a:rPr sz="1200" b="0" i="0">
-                <a:solidFill>
-                  <a:srgbClr val="20242E"/>
-                </a:solidFill>
-                <a:latin typeface="Inter"/>
-              </a:rPr>
-              <a:t>het origen vragen &amp; zeggen (soy de + país)</a:t>
-            </a:r>
-          </a:p>
-        </p:txBody>
-      </p:sp>
-      <p:sp>
-        <p:nvSpPr>
-          <p:cNvPr id="13" name="TextBox 12"/>
+              <a:rPr sz="900" b="0" i="0">
+                <a:solidFill>
+                  <a:srgbClr val="6A6E78"/>
+                </a:solidFill>
+                <a:latin typeface="Inter"/>
+              </a:rPr>
+              <a:t>Me llamo… · (Yo) soy… · Encantado/a · Soy de… (país) · Soy español/a · mexicano/a · belga</a:t>
+            </a:r>
+          </a:p>
+        </p:txBody>
+      </p:sp>
+      <p:sp>
+        <p:nvSpPr>
+          <p:cNvPr id="15" name="Rounded Rectangle 14"/>
+          <p:cNvSpPr/>
+          <p:nvPr/>
+        </p:nvSpPr>
+        <p:spPr>
+          <a:xfrm>
+            <a:off x="502920" y="2898648"/>
+            <a:ext cx="5394960" cy="1060704"/>
+          </a:xfrm>
+          <a:prstGeom prst="roundRect">
+            <a:avLst>
+              <a:gd name="adj" fmla="val 5500"/>
+            </a:avLst>
+          </a:prstGeom>
+          <a:solidFill>
+            <a:srgbClr val="FBEAEC"/>
+          </a:solidFill>
+          <a:ln w="15240">
+            <a:solidFill>
+              <a:srgbClr val="D64550"/>
+            </a:solidFill>
+          </a:ln>
+          <a:effectLst/>
+          <a:effectLst>
+            <a:outerShdw blurRad="90000" dist="38000" dir="5400000" rotWithShape="0">
+              <a:srgbClr val="20242E">
+                <a:alpha val="22000"/>
+              </a:srgbClr>
+            </a:outerShdw>
+          </a:effectLst>
+        </p:spPr>
+        <p:style>
+          <a:lnRef idx="1">
+            <a:schemeClr val="accent1"/>
+          </a:lnRef>
+          <a:fillRef idx="3">
+            <a:schemeClr val="accent1"/>
+          </a:fillRef>
+          <a:effectRef idx="2">
+            <a:schemeClr val="accent1"/>
+          </a:effectRef>
+          <a:fontRef idx="minor">
+            <a:schemeClr val="lt1"/>
+          </a:fontRef>
+        </p:style>
+        <p:txBody>
+          <a:bodyPr rtlCol="0" anchor="ctr"/>
+          <a:lstStyle/>
+          <a:p>
+            <a:pPr algn="ctr"/>
+          </a:p>
+        </p:txBody>
+      </p:sp>
+      <p:sp>
+        <p:nvSpPr>
+          <p:cNvPr id="16" name="TextBox 15"/>
           <p:cNvSpPr txBox="1"/>
           <p:nvPr/>
         </p:nvSpPr>
         <p:spPr>
           <a:xfrm>
-            <a:off x="7909560" y="2990088"/>
-            <a:ext cx="3566160" cy="640080"/>
+            <a:off x="704088" y="3008376"/>
+            <a:ext cx="4992624" cy="365760"/>
           </a:xfrm>
           <a:prstGeom prst="rect">
             <a:avLst/>
@@ -8548,36 +8558,36 @@
               </a:spcAft>
             </a:pPr>
             <a:r>
-              <a:rPr sz="1200" b="0" i="0">
+              <a:rPr sz="1250" b="1" i="0">
                 <a:solidFill>
                   <a:srgbClr val="20242E"/>
                 </a:solidFill>
-                <a:latin typeface="Inter"/>
-              </a:rPr>
-              <a:t>🟢🟡🔴  </a:t>
-            </a:r>
-            <a:r>
-              <a:rPr sz="1200" b="0" i="0">
-                <a:solidFill>
-                  <a:srgbClr val="20242E"/>
-                </a:solidFill>
-                <a:latin typeface="Inter"/>
-              </a:rPr>
-              <a:t>de nationaliteit geven (♂/♀, kleine letter)</a:t>
-            </a:r>
-          </a:p>
-        </p:txBody>
-      </p:sp>
-      <p:sp>
-        <p:nvSpPr>
-          <p:cNvPr id="14" name="TextBox 13"/>
+                <a:latin typeface="Bricolage Grotesque"/>
+              </a:rPr>
+              <a:t>Pedir y dar información personal</a:t>
+            </a:r>
+            <a:r>
+              <a:rPr sz="900" b="1" i="0">
+                <a:solidFill>
+                  <a:srgbClr val="A8323B"/>
+                </a:solidFill>
+                <a:latin typeface="Inter"/>
+              </a:rPr>
+              <a:t>  ▲ nivel+</a:t>
+            </a:r>
+          </a:p>
+        </p:txBody>
+      </p:sp>
+      <p:sp>
+        <p:nvSpPr>
+          <p:cNvPr id="17" name="TextBox 16"/>
           <p:cNvSpPr txBox="1"/>
           <p:nvPr/>
         </p:nvSpPr>
         <p:spPr>
           <a:xfrm>
-            <a:off x="7909560" y="3648456"/>
-            <a:ext cx="3566160" cy="640080"/>
+            <a:off x="704088" y="3401568"/>
+            <a:ext cx="4992624" cy="502920"/>
           </a:xfrm>
           <a:prstGeom prst="rect">
             <a:avLst/>
@@ -8602,36 +8612,82 @@
               </a:spcAft>
             </a:pPr>
             <a:r>
-              <a:rPr sz="1200" b="0" i="0">
-                <a:solidFill>
-                  <a:srgbClr val="20242E"/>
-                </a:solidFill>
-                <a:latin typeface="Inter"/>
-              </a:rPr>
-              <a:t>🟢🟡🔴  </a:t>
-            </a:r>
-            <a:r>
-              <a:rPr sz="1200" b="0" i="0">
-                <a:solidFill>
-                  <a:srgbClr val="20242E"/>
-                </a:solidFill>
-                <a:latin typeface="Inter"/>
-              </a:rPr>
-              <a:t>zeggen welke talen ik spreek (hablo…)</a:t>
-            </a:r>
-          </a:p>
-        </p:txBody>
-      </p:sp>
-      <p:sp>
-        <p:nvSpPr>
-          <p:cNvPr id="15" name="TextBox 14"/>
+              <a:rPr sz="900" b="0" i="0">
+                <a:solidFill>
+                  <a:srgbClr val="6A6E78"/>
+                </a:solidFill>
+                <a:latin typeface="Inter"/>
+              </a:rPr>
+              <a:t>¿Cómo te llamas? · ¿Y tú? · ¿De dónde eres? · ¿De qué país? · ¿Qué idiomas hablas?</a:t>
+            </a:r>
+          </a:p>
+        </p:txBody>
+      </p:sp>
+      <p:sp>
+        <p:nvSpPr>
+          <p:cNvPr id="18" name="Rounded Rectangle 17"/>
+          <p:cNvSpPr/>
+          <p:nvPr/>
+        </p:nvSpPr>
+        <p:spPr>
+          <a:xfrm>
+            <a:off x="6263640" y="2898648"/>
+            <a:ext cx="5394960" cy="1060704"/>
+          </a:xfrm>
+          <a:prstGeom prst="roundRect">
+            <a:avLst>
+              <a:gd name="adj" fmla="val 5500"/>
+            </a:avLst>
+          </a:prstGeom>
+          <a:solidFill>
+            <a:srgbClr val="FFFFFF"/>
+          </a:solidFill>
+          <a:ln w="15240">
+            <a:solidFill>
+              <a:srgbClr val="E4E3DE"/>
+            </a:solidFill>
+          </a:ln>
+          <a:effectLst/>
+          <a:effectLst>
+            <a:outerShdw blurRad="90000" dist="38000" dir="5400000" rotWithShape="0">
+              <a:srgbClr val="20242E">
+                <a:alpha val="22000"/>
+              </a:srgbClr>
+            </a:outerShdw>
+          </a:effectLst>
+        </p:spPr>
+        <p:style>
+          <a:lnRef idx="1">
+            <a:schemeClr val="accent1"/>
+          </a:lnRef>
+          <a:fillRef idx="3">
+            <a:schemeClr val="accent1"/>
+          </a:fillRef>
+          <a:effectRef idx="2">
+            <a:schemeClr val="accent1"/>
+          </a:effectRef>
+          <a:fontRef idx="minor">
+            <a:schemeClr val="lt1"/>
+          </a:fontRef>
+        </p:style>
+        <p:txBody>
+          <a:bodyPr rtlCol="0" anchor="ctr"/>
+          <a:lstStyle/>
+          <a:p>
+            <a:pPr algn="ctr"/>
+          </a:p>
+        </p:txBody>
+      </p:sp>
+      <p:sp>
+        <p:nvSpPr>
+          <p:cNvPr id="19" name="TextBox 18"/>
           <p:cNvSpPr txBox="1"/>
           <p:nvPr/>
         </p:nvSpPr>
         <p:spPr>
           <a:xfrm>
-            <a:off x="7909560" y="4306824"/>
-            <a:ext cx="3566160" cy="640080"/>
+            <a:off x="6464808" y="3008376"/>
+            <a:ext cx="4992624" cy="365760"/>
           </a:xfrm>
           <a:prstGeom prst="rect">
             <a:avLst/>
@@ -8656,36 +8712,36 @@
               </a:spcAft>
             </a:pPr>
             <a:r>
-              <a:rPr sz="1200" b="0" i="0">
+              <a:rPr sz="1250" b="1" i="0">
                 <a:solidFill>
                   <a:srgbClr val="20242E"/>
                 </a:solidFill>
-                <a:latin typeface="Inter"/>
-              </a:rPr>
-              <a:t>🟢🟡🔴  </a:t>
-            </a:r>
-            <a:r>
-              <a:rPr sz="1200" b="0" i="0">
-                <a:solidFill>
-                  <a:srgbClr val="20242E"/>
-                </a:solidFill>
-                <a:latin typeface="Inter"/>
-              </a:rPr>
-              <a:t>landen van het mundo hispano situeren</a:t>
-            </a:r>
-          </a:p>
-        </p:txBody>
-      </p:sp>
-      <p:sp>
-        <p:nvSpPr>
-          <p:cNvPr id="16" name="TextBox 15"/>
+                <a:latin typeface="Bricolage Grotesque"/>
+              </a:rPr>
+              <a:t>Reaccionar con cortesía</a:t>
+            </a:r>
+            <a:r>
+              <a:rPr sz="900" b="1" i="0">
+                <a:solidFill>
+                  <a:srgbClr val="A8323B"/>
+                </a:solidFill>
+                <a:latin typeface="Inter"/>
+              </a:rPr>
+              <a:t/>
+            </a:r>
+          </a:p>
+        </p:txBody>
+      </p:sp>
+      <p:sp>
+        <p:nvSpPr>
+          <p:cNvPr id="20" name="TextBox 19"/>
           <p:cNvSpPr txBox="1"/>
           <p:nvPr/>
         </p:nvSpPr>
         <p:spPr>
           <a:xfrm>
-            <a:off x="7909560" y="5029200"/>
-            <a:ext cx="3566160" cy="640080"/>
+            <a:off x="6464808" y="3401568"/>
+            <a:ext cx="4992624" cy="502920"/>
           </a:xfrm>
           <a:prstGeom prst="rect">
             <a:avLst/>
@@ -8710,15 +8766,301 @@
               </a:spcAft>
             </a:pPr>
             <a:r>
-              <a:rPr sz="1200" b="1" i="0">
+              <a:rPr sz="900" b="0" i="0">
+                <a:solidFill>
+                  <a:srgbClr val="6A6E78"/>
+                </a:solidFill>
+                <a:latin typeface="Inter"/>
+              </a:rPr>
+              <a:t>Por favor · Gracias · Muchas gracias · De nada · Perdona</a:t>
+            </a:r>
+          </a:p>
+        </p:txBody>
+      </p:sp>
+      <p:sp>
+        <p:nvSpPr>
+          <p:cNvPr id="21" name="Rounded Rectangle 20"/>
+          <p:cNvSpPr/>
+          <p:nvPr/>
+        </p:nvSpPr>
+        <p:spPr>
+          <a:xfrm>
+            <a:off x="502920" y="4105656"/>
+            <a:ext cx="5394960" cy="1060704"/>
+          </a:xfrm>
+          <a:prstGeom prst="roundRect">
+            <a:avLst>
+              <a:gd name="adj" fmla="val 5500"/>
+            </a:avLst>
+          </a:prstGeom>
+          <a:solidFill>
+            <a:srgbClr val="FFFFFF"/>
+          </a:solidFill>
+          <a:ln w="15240">
+            <a:solidFill>
+              <a:srgbClr val="E4E3DE"/>
+            </a:solidFill>
+          </a:ln>
+          <a:effectLst/>
+          <a:effectLst>
+            <a:outerShdw blurRad="90000" dist="38000" dir="5400000" rotWithShape="0">
+              <a:srgbClr val="20242E">
+                <a:alpha val="22000"/>
+              </a:srgbClr>
+            </a:outerShdw>
+          </a:effectLst>
+        </p:spPr>
+        <p:style>
+          <a:lnRef idx="1">
+            <a:schemeClr val="accent1"/>
+          </a:lnRef>
+          <a:fillRef idx="3">
+            <a:schemeClr val="accent1"/>
+          </a:fillRef>
+          <a:effectRef idx="2">
+            <a:schemeClr val="accent1"/>
+          </a:effectRef>
+          <a:fontRef idx="minor">
+            <a:schemeClr val="lt1"/>
+          </a:fontRef>
+        </p:style>
+        <p:txBody>
+          <a:bodyPr rtlCol="0" anchor="ctr"/>
+          <a:lstStyle/>
+          <a:p>
+            <a:pPr algn="ctr"/>
+          </a:p>
+        </p:txBody>
+      </p:sp>
+      <p:sp>
+        <p:nvSpPr>
+          <p:cNvPr id="22" name="TextBox 21"/>
+          <p:cNvSpPr txBox="1"/>
+          <p:nvPr/>
+        </p:nvSpPr>
+        <p:spPr>
+          <a:xfrm>
+            <a:off x="704088" y="4215384"/>
+            <a:ext cx="4992624" cy="365760"/>
+          </a:xfrm>
+          <a:prstGeom prst="rect">
+            <a:avLst/>
+          </a:prstGeom>
+          <a:noFill/>
+        </p:spPr>
+        <p:txBody>
+          <a:bodyPr wrap="square" anchor="t" lIns="38100" rIns="38100" tIns="25400" bIns="25400">
+            <a:spAutoFit/>
+          </a:bodyPr>
+          <a:lstStyle/>
+          <a:p>
+            <a:pPr algn="l">
+              <a:lnSpc>
+                <a:spcPct val="106000"/>
+              </a:lnSpc>
+              <a:spcBef>
+                <a:spcPts val="0"/>
+              </a:spcBef>
+              <a:spcAft>
+                <a:spcPts val="200"/>
+              </a:spcAft>
+            </a:pPr>
+            <a:r>
+              <a:rPr sz="1250" b="1" i="0">
+                <a:solidFill>
+                  <a:srgbClr val="20242E"/>
+                </a:solidFill>
+                <a:latin typeface="Bricolage Grotesque"/>
+              </a:rPr>
+              <a:t>Preguntar y decir cómo estoy</a:t>
+            </a:r>
+            <a:r>
+              <a:rPr sz="900" b="1" i="0">
                 <a:solidFill>
                   <a:srgbClr val="A8323B"/>
                 </a:solidFill>
+                <a:latin typeface="Inter"/>
+              </a:rPr>
+              <a:t/>
+            </a:r>
+          </a:p>
+        </p:txBody>
+      </p:sp>
+      <p:sp>
+        <p:nvSpPr>
+          <p:cNvPr id="23" name="TextBox 22"/>
+          <p:cNvSpPr txBox="1"/>
+          <p:nvPr/>
+        </p:nvSpPr>
+        <p:spPr>
+          <a:xfrm>
+            <a:off x="704088" y="4608576"/>
+            <a:ext cx="4992624" cy="502920"/>
+          </a:xfrm>
+          <a:prstGeom prst="rect">
+            <a:avLst/>
+          </a:prstGeom>
+          <a:noFill/>
+        </p:spPr>
+        <p:txBody>
+          <a:bodyPr wrap="square" anchor="t" lIns="38100" rIns="38100" tIns="25400" bIns="25400">
+            <a:spAutoFit/>
+          </a:bodyPr>
+          <a:lstStyle/>
+          <a:p>
+            <a:pPr algn="l">
+              <a:lnSpc>
+                <a:spcPct val="106000"/>
+              </a:lnSpc>
+              <a:spcBef>
+                <a:spcPts val="0"/>
+              </a:spcBef>
+              <a:spcAft>
+                <a:spcPts val="200"/>
+              </a:spcAft>
+            </a:pPr>
+            <a:r>
+              <a:rPr sz="900" b="0" i="0">
+                <a:solidFill>
+                  <a:srgbClr val="6A6E78"/>
+                </a:solidFill>
+                <a:latin typeface="Inter"/>
+              </a:rPr>
+              <a:t>¿Qué tal? · ¿Cómo estás? · Estoy bien / cansado-a / ocupado-a · Regular</a:t>
+            </a:r>
+          </a:p>
+        </p:txBody>
+      </p:sp>
+      <p:sp>
+        <p:nvSpPr>
+          <p:cNvPr id="24" name="Rounded Rectangle 23"/>
+          <p:cNvSpPr/>
+          <p:nvPr/>
+        </p:nvSpPr>
+        <p:spPr>
+          <a:xfrm>
+            <a:off x="6263640" y="4105656"/>
+            <a:ext cx="5394960" cy="1060704"/>
+          </a:xfrm>
+          <a:prstGeom prst="roundRect">
+            <a:avLst>
+              <a:gd name="adj" fmla="val 5500"/>
+            </a:avLst>
+          </a:prstGeom>
+          <a:solidFill>
+            <a:srgbClr val="FBEAEC"/>
+          </a:solidFill>
+          <a:ln w="15240">
+            <a:solidFill>
+              <a:srgbClr val="D64550"/>
+            </a:solidFill>
+          </a:ln>
+          <a:effectLst/>
+          <a:effectLst>
+            <a:outerShdw blurRad="90000" dist="38000" dir="5400000" rotWithShape="0">
+              <a:srgbClr val="20242E">
+                <a:alpha val="22000"/>
+              </a:srgbClr>
+            </a:outerShdw>
+          </a:effectLst>
+        </p:spPr>
+        <p:style>
+          <a:lnRef idx="1">
+            <a:schemeClr val="accent1"/>
+          </a:lnRef>
+          <a:fillRef idx="3">
+            <a:schemeClr val="accent1"/>
+          </a:fillRef>
+          <a:effectRef idx="2">
+            <a:schemeClr val="accent1"/>
+          </a:effectRef>
+          <a:fontRef idx="minor">
+            <a:schemeClr val="lt1"/>
+          </a:fontRef>
+        </p:style>
+        <p:txBody>
+          <a:bodyPr rtlCol="0" anchor="ctr"/>
+          <a:lstStyle/>
+          <a:p>
+            <a:pPr algn="ctr"/>
+          </a:p>
+        </p:txBody>
+      </p:sp>
+      <p:sp>
+        <p:nvSpPr>
+          <p:cNvPr id="25" name="TextBox 24"/>
+          <p:cNvSpPr txBox="1"/>
+          <p:nvPr/>
+        </p:nvSpPr>
+        <p:spPr>
+          <a:xfrm>
+            <a:off x="6464808" y="4215384"/>
+            <a:ext cx="4992624" cy="365760"/>
+          </a:xfrm>
+          <a:prstGeom prst="rect">
+            <a:avLst/>
+          </a:prstGeom>
+          <a:noFill/>
+        </p:spPr>
+        <p:txBody>
+          <a:bodyPr wrap="square" anchor="t" lIns="38100" rIns="38100" tIns="25400" bIns="25400">
+            <a:spAutoFit/>
+          </a:bodyPr>
+          <a:lstStyle/>
+          <a:p>
+            <a:pPr algn="l">
+              <a:lnSpc>
+                <a:spcPct val="106000"/>
+              </a:lnSpc>
+              <a:spcBef>
+                <a:spcPts val="0"/>
+              </a:spcBef>
+              <a:spcAft>
+                <a:spcPts val="200"/>
+              </a:spcAft>
+            </a:pPr>
+            <a:r>
+              <a:rPr sz="1250" b="1" i="0">
+                <a:solidFill>
+                  <a:srgbClr val="20242E"/>
+                </a:solidFill>
                 <a:latin typeface="Bricolage Grotesque"/>
               </a:rPr>
-              <a:t>🎮 Repasa jugando</a:t>
-            </a:r>
-          </a:p>
+              <a:t>Pedir algo</a:t>
+            </a:r>
+            <a:r>
+              <a:rPr sz="900" b="1" i="0">
+                <a:solidFill>
+                  <a:srgbClr val="A8323B"/>
+                </a:solidFill>
+                <a:latin typeface="Inter"/>
+              </a:rPr>
+              <a:t>  ● NUEVA</a:t>
+            </a:r>
+          </a:p>
+        </p:txBody>
+      </p:sp>
+      <p:sp>
+        <p:nvSpPr>
+          <p:cNvPr id="26" name="TextBox 25"/>
+          <p:cNvSpPr txBox="1"/>
+          <p:nvPr/>
+        </p:nvSpPr>
+        <p:spPr>
+          <a:xfrm>
+            <a:off x="6464808" y="4608576"/>
+            <a:ext cx="4992624" cy="502920"/>
+          </a:xfrm>
+          <a:prstGeom prst="rect">
+            <a:avLst/>
+          </a:prstGeom>
+          <a:noFill/>
+        </p:spPr>
+        <p:txBody>
+          <a:bodyPr wrap="square" anchor="t" lIns="38100" rIns="38100" tIns="25400" bIns="25400">
+            <a:spAutoFit/>
+          </a:bodyPr>
+          <a:lstStyle/>
           <a:p>
             <a:pPr algn="l">
               <a:lnSpc>
@@ -8732,20 +9074,328 @@
               </a:spcAft>
             </a:pPr>
             <a:r>
-              <a:rPr sz="1100" b="0" i="1">
+              <a:rPr sz="900" b="0" i="0">
                 <a:solidFill>
                   <a:srgbClr val="6A6E78"/>
                 </a:solidFill>
                 <a:latin typeface="Inter"/>
               </a:rPr>
-              <a:t>online op de hub · wereldkaart</a:t>
-            </a:r>
-          </a:p>
-        </p:txBody>
-      </p:sp>
-      <p:sp>
-        <p:nvSpPr>
-          <p:cNvPr id="17" name="Rectangle 16"/>
+              <a:t>…, por favor · ¿Me da…?</a:t>
+            </a:r>
+          </a:p>
+        </p:txBody>
+      </p:sp>
+      <p:sp>
+        <p:nvSpPr>
+          <p:cNvPr id="27" name="Rounded Rectangle 26"/>
+          <p:cNvSpPr/>
+          <p:nvPr/>
+        </p:nvSpPr>
+        <p:spPr>
+          <a:xfrm>
+            <a:off x="502920" y="5312664"/>
+            <a:ext cx="5394960" cy="1060704"/>
+          </a:xfrm>
+          <a:prstGeom prst="roundRect">
+            <a:avLst>
+              <a:gd name="adj" fmla="val 5500"/>
+            </a:avLst>
+          </a:prstGeom>
+          <a:solidFill>
+            <a:srgbClr val="FBEAEC"/>
+          </a:solidFill>
+          <a:ln w="15240">
+            <a:solidFill>
+              <a:srgbClr val="D64550"/>
+            </a:solidFill>
+          </a:ln>
+          <a:effectLst/>
+          <a:effectLst>
+            <a:outerShdw blurRad="90000" dist="38000" dir="5400000" rotWithShape="0">
+              <a:srgbClr val="20242E">
+                <a:alpha val="22000"/>
+              </a:srgbClr>
+            </a:outerShdw>
+          </a:effectLst>
+        </p:spPr>
+        <p:style>
+          <a:lnRef idx="1">
+            <a:schemeClr val="accent1"/>
+          </a:lnRef>
+          <a:fillRef idx="3">
+            <a:schemeClr val="accent1"/>
+          </a:fillRef>
+          <a:effectRef idx="2">
+            <a:schemeClr val="accent1"/>
+          </a:effectRef>
+          <a:fontRef idx="minor">
+            <a:schemeClr val="lt1"/>
+          </a:fontRef>
+        </p:style>
+        <p:txBody>
+          <a:bodyPr rtlCol="0" anchor="ctr"/>
+          <a:lstStyle/>
+          <a:p>
+            <a:pPr algn="ctr"/>
+          </a:p>
+        </p:txBody>
+      </p:sp>
+      <p:sp>
+        <p:nvSpPr>
+          <p:cNvPr id="28" name="TextBox 27"/>
+          <p:cNvSpPr txBox="1"/>
+          <p:nvPr/>
+        </p:nvSpPr>
+        <p:spPr>
+          <a:xfrm>
+            <a:off x="704088" y="5422392"/>
+            <a:ext cx="4992624" cy="365760"/>
+          </a:xfrm>
+          <a:prstGeom prst="rect">
+            <a:avLst/>
+          </a:prstGeom>
+          <a:noFill/>
+        </p:spPr>
+        <p:txBody>
+          <a:bodyPr wrap="square" anchor="t" lIns="38100" rIns="38100" tIns="25400" bIns="25400">
+            <a:spAutoFit/>
+          </a:bodyPr>
+          <a:lstStyle/>
+          <a:p>
+            <a:pPr algn="l">
+              <a:lnSpc>
+                <a:spcPct val="106000"/>
+              </a:lnSpc>
+              <a:spcBef>
+                <a:spcPts val="0"/>
+              </a:spcBef>
+              <a:spcAft>
+                <a:spcPts val="200"/>
+              </a:spcAft>
+            </a:pPr>
+            <a:r>
+              <a:rPr sz="1250" b="1" i="0">
+                <a:solidFill>
+                  <a:srgbClr val="20242E"/>
+                </a:solidFill>
+                <a:latin typeface="Bricolage Grotesque"/>
+              </a:rPr>
+              <a:t>Contar (números 0–20)</a:t>
+            </a:r>
+            <a:r>
+              <a:rPr sz="900" b="1" i="0">
+                <a:solidFill>
+                  <a:srgbClr val="A8323B"/>
+                </a:solidFill>
+                <a:latin typeface="Inter"/>
+              </a:rPr>
+              <a:t>  ● NUEVA</a:t>
+            </a:r>
+          </a:p>
+        </p:txBody>
+      </p:sp>
+      <p:sp>
+        <p:nvSpPr>
+          <p:cNvPr id="29" name="TextBox 28"/>
+          <p:cNvSpPr txBox="1"/>
+          <p:nvPr/>
+        </p:nvSpPr>
+        <p:spPr>
+          <a:xfrm>
+            <a:off x="704088" y="5815584"/>
+            <a:ext cx="4992624" cy="502920"/>
+          </a:xfrm>
+          <a:prstGeom prst="rect">
+            <a:avLst/>
+          </a:prstGeom>
+          <a:noFill/>
+        </p:spPr>
+        <p:txBody>
+          <a:bodyPr wrap="square" anchor="t" lIns="38100" rIns="38100" tIns="25400" bIns="25400">
+            <a:spAutoFit/>
+          </a:bodyPr>
+          <a:lstStyle/>
+          <a:p>
+            <a:pPr algn="l">
+              <a:lnSpc>
+                <a:spcPct val="106000"/>
+              </a:lnSpc>
+              <a:spcBef>
+                <a:spcPts val="0"/>
+              </a:spcBef>
+              <a:spcAft>
+                <a:spcPts val="200"/>
+              </a:spcAft>
+            </a:pPr>
+            <a:r>
+              <a:rPr sz="900" b="0" i="0">
+                <a:solidFill>
+                  <a:srgbClr val="6A6E78"/>
+                </a:solidFill>
+                <a:latin typeface="Inter"/>
+              </a:rPr>
+              <a:t>uno · dos · tres · cinco · diez · veinte</a:t>
+            </a:r>
+          </a:p>
+        </p:txBody>
+      </p:sp>
+      <p:sp>
+        <p:nvSpPr>
+          <p:cNvPr id="30" name="Rounded Rectangle 29"/>
+          <p:cNvSpPr/>
+          <p:nvPr/>
+        </p:nvSpPr>
+        <p:spPr>
+          <a:xfrm>
+            <a:off x="6263640" y="5312664"/>
+            <a:ext cx="5394960" cy="1060704"/>
+          </a:xfrm>
+          <a:prstGeom prst="roundRect">
+            <a:avLst>
+              <a:gd name="adj" fmla="val 5500"/>
+            </a:avLst>
+          </a:prstGeom>
+          <a:solidFill>
+            <a:srgbClr val="FBEAEC"/>
+          </a:solidFill>
+          <a:ln w="15240">
+            <a:solidFill>
+              <a:srgbClr val="D64550"/>
+            </a:solidFill>
+          </a:ln>
+          <a:effectLst/>
+          <a:effectLst>
+            <a:outerShdw blurRad="90000" dist="38000" dir="5400000" rotWithShape="0">
+              <a:srgbClr val="20242E">
+                <a:alpha val="22000"/>
+              </a:srgbClr>
+            </a:outerShdw>
+          </a:effectLst>
+        </p:spPr>
+        <p:style>
+          <a:lnRef idx="1">
+            <a:schemeClr val="accent1"/>
+          </a:lnRef>
+          <a:fillRef idx="3">
+            <a:schemeClr val="accent1"/>
+          </a:fillRef>
+          <a:effectRef idx="2">
+            <a:schemeClr val="accent1"/>
+          </a:effectRef>
+          <a:fontRef idx="minor">
+            <a:schemeClr val="lt1"/>
+          </a:fontRef>
+        </p:style>
+        <p:txBody>
+          <a:bodyPr rtlCol="0" anchor="ctr"/>
+          <a:lstStyle/>
+          <a:p>
+            <a:pPr algn="ctr"/>
+          </a:p>
+        </p:txBody>
+      </p:sp>
+      <p:sp>
+        <p:nvSpPr>
+          <p:cNvPr id="31" name="TextBox 30"/>
+          <p:cNvSpPr txBox="1"/>
+          <p:nvPr/>
+        </p:nvSpPr>
+        <p:spPr>
+          <a:xfrm>
+            <a:off x="6464808" y="5422392"/>
+            <a:ext cx="4992624" cy="365760"/>
+          </a:xfrm>
+          <a:prstGeom prst="rect">
+            <a:avLst/>
+          </a:prstGeom>
+          <a:noFill/>
+        </p:spPr>
+        <p:txBody>
+          <a:bodyPr wrap="square" anchor="t" lIns="38100" rIns="38100" tIns="25400" bIns="25400">
+            <a:spAutoFit/>
+          </a:bodyPr>
+          <a:lstStyle/>
+          <a:p>
+            <a:pPr algn="l">
+              <a:lnSpc>
+                <a:spcPct val="106000"/>
+              </a:lnSpc>
+              <a:spcBef>
+                <a:spcPts val="0"/>
+              </a:spcBef>
+              <a:spcAft>
+                <a:spcPts val="200"/>
+              </a:spcAft>
+            </a:pPr>
+            <a:r>
+              <a:rPr sz="1250" b="1" i="0">
+                <a:solidFill>
+                  <a:srgbClr val="20242E"/>
+                </a:solidFill>
+                <a:latin typeface="Bricolage Grotesque"/>
+              </a:rPr>
+              <a:t>Gestionar la comprensión</a:t>
+            </a:r>
+            <a:r>
+              <a:rPr sz="900" b="1" i="0">
+                <a:solidFill>
+                  <a:srgbClr val="A8323B"/>
+                </a:solidFill>
+                <a:latin typeface="Inter"/>
+              </a:rPr>
+              <a:t>  ▲ nivel+</a:t>
+            </a:r>
+          </a:p>
+        </p:txBody>
+      </p:sp>
+      <p:sp>
+        <p:nvSpPr>
+          <p:cNvPr id="32" name="TextBox 31"/>
+          <p:cNvSpPr txBox="1"/>
+          <p:nvPr/>
+        </p:nvSpPr>
+        <p:spPr>
+          <a:xfrm>
+            <a:off x="6464808" y="5815584"/>
+            <a:ext cx="4992624" cy="502920"/>
+          </a:xfrm>
+          <a:prstGeom prst="rect">
+            <a:avLst/>
+          </a:prstGeom>
+          <a:noFill/>
+        </p:spPr>
+        <p:txBody>
+          <a:bodyPr wrap="square" anchor="t" lIns="38100" rIns="38100" tIns="25400" bIns="25400">
+            <a:spAutoFit/>
+          </a:bodyPr>
+          <a:lstStyle/>
+          <a:p>
+            <a:pPr algn="l">
+              <a:lnSpc>
+                <a:spcPct val="106000"/>
+              </a:lnSpc>
+              <a:spcBef>
+                <a:spcPts val="0"/>
+              </a:spcBef>
+              <a:spcAft>
+                <a:spcPts val="200"/>
+              </a:spcAft>
+            </a:pPr>
+            <a:r>
+              <a:rPr sz="900" b="0" i="0">
+                <a:solidFill>
+                  <a:srgbClr val="6A6E78"/>
+                </a:solidFill>
+                <a:latin typeface="Inter"/>
+              </a:rPr>
+              <a:t>¿Cómo? · Otra vez, por favor · ¿Puedes repetir? · Más despacio, por favor · No entiendo</a:t>
+            </a:r>
+          </a:p>
+        </p:txBody>
+      </p:sp>
+      <p:sp>
+        <p:nvSpPr>
+          <p:cNvPr id="33" name="Rectangle 32"/>
           <p:cNvSpPr/>
           <p:nvPr/>
         </p:nvSpPr>
@@ -8789,7 +9439,7 @@
       </p:sp>
       <p:sp>
         <p:nvSpPr>
-          <p:cNvPr id="18" name="TextBox 17"/>
+          <p:cNvPr id="34" name="TextBox 33"/>
           <p:cNvSpPr txBox="1"/>
           <p:nvPr/>
         </p:nvSpPr>
@@ -8843,7 +9493,7 @@
       </p:sp>
       <p:sp>
         <p:nvSpPr>
-          <p:cNvPr id="19" name="TextBox 18"/>
+          <p:cNvPr id="35" name="TextBox 34"/>
           <p:cNvSpPr txBox="1"/>
           <p:nvPr/>
         </p:nvSpPr>
@@ -8888,7 +9538,7 @@
       </p:sp>
       <p:sp>
         <p:nvSpPr>
-          <p:cNvPr id="20" name="TextBox 19"/>
+          <p:cNvPr id="36" name="TextBox 35"/>
           <p:cNvSpPr txBox="1"/>
           <p:nvPr/>
         </p:nvSpPr>
@@ -8964,7 +9614,7 @@
             <a:avLst/>
           </a:prstGeom>
           <a:solidFill>
-            <a:srgbClr val="241C1B"/>
+            <a:srgbClr val="FCFBF8"/>
           </a:solidFill>
           <a:ln>
             <a:noFill/>
@@ -8995,14 +9645,202 @@
       </p:sp>
       <p:sp>
         <p:nvSpPr>
-          <p:cNvPr id="3" name="TextBox 2"/>
+          <p:cNvPr id="3" name="Rectangle 2"/>
+          <p:cNvSpPr/>
+          <p:nvPr/>
+        </p:nvSpPr>
+        <p:spPr>
+          <a:xfrm>
+            <a:off x="0" y="0"/>
+            <a:ext cx="12191695" cy="1078992"/>
+          </a:xfrm>
+          <a:prstGeom prst="rect">
+            <a:avLst/>
+          </a:prstGeom>
+          <a:solidFill>
+            <a:srgbClr val="D64550"/>
+          </a:solidFill>
+          <a:ln>
+            <a:noFill/>
+          </a:ln>
+          <a:effectLst/>
+        </p:spPr>
+        <p:style>
+          <a:lnRef idx="1">
+            <a:schemeClr val="accent1"/>
+          </a:lnRef>
+          <a:fillRef idx="3">
+            <a:schemeClr val="accent1"/>
+          </a:fillRef>
+          <a:effectRef idx="2">
+            <a:schemeClr val="accent1"/>
+          </a:effectRef>
+          <a:fontRef idx="minor">
+            <a:schemeClr val="lt1"/>
+          </a:fontRef>
+        </p:style>
+        <p:txBody>
+          <a:bodyPr rtlCol="0" anchor="ctr"/>
+          <a:lstStyle/>
+          <a:p>
+            <a:pPr algn="ctr"/>
+          </a:p>
+        </p:txBody>
+      </p:sp>
+      <p:sp>
+        <p:nvSpPr>
+          <p:cNvPr id="4" name="Rectangle 3"/>
+          <p:cNvSpPr/>
+          <p:nvPr/>
+        </p:nvSpPr>
+        <p:spPr>
+          <a:xfrm>
+            <a:off x="0" y="1078992"/>
+            <a:ext cx="12191695" cy="54864"/>
+          </a:xfrm>
+          <a:prstGeom prst="rect">
+            <a:avLst/>
+          </a:prstGeom>
+          <a:solidFill>
+            <a:srgbClr val="A8323B"/>
+          </a:solidFill>
+          <a:ln>
+            <a:noFill/>
+          </a:ln>
+          <a:effectLst/>
+        </p:spPr>
+        <p:style>
+          <a:lnRef idx="1">
+            <a:schemeClr val="accent1"/>
+          </a:lnRef>
+          <a:fillRef idx="3">
+            <a:schemeClr val="accent1"/>
+          </a:fillRef>
+          <a:effectRef idx="2">
+            <a:schemeClr val="accent1"/>
+          </a:effectRef>
+          <a:fontRef idx="minor">
+            <a:schemeClr val="lt1"/>
+          </a:fontRef>
+        </p:style>
+        <p:txBody>
+          <a:bodyPr rtlCol="0" anchor="ctr"/>
+          <a:lstStyle/>
+          <a:p>
+            <a:pPr algn="ctr"/>
+          </a:p>
+        </p:txBody>
+      </p:sp>
+      <p:sp>
+        <p:nvSpPr>
+          <p:cNvPr id="5" name="Rounded Rectangle 4"/>
+          <p:cNvSpPr/>
+          <p:nvPr/>
+        </p:nvSpPr>
+        <p:spPr>
+          <a:xfrm>
+            <a:off x="502920" y="182880"/>
+            <a:ext cx="623620" cy="292608"/>
+          </a:xfrm>
+          <a:prstGeom prst="roundRect">
+            <a:avLst>
+              <a:gd name="adj" fmla="val 50000"/>
+            </a:avLst>
+          </a:prstGeom>
+          <a:solidFill>
+            <a:srgbClr val="FFFFFF"/>
+          </a:solidFill>
+          <a:ln>
+            <a:noFill/>
+          </a:ln>
+          <a:effectLst/>
+        </p:spPr>
+        <p:style>
+          <a:lnRef idx="1">
+            <a:schemeClr val="accent1"/>
+          </a:lnRef>
+          <a:fillRef idx="3">
+            <a:schemeClr val="accent1"/>
+          </a:fillRef>
+          <a:effectRef idx="2">
+            <a:schemeClr val="accent1"/>
+          </a:effectRef>
+          <a:fontRef idx="minor">
+            <a:schemeClr val="lt1"/>
+          </a:fontRef>
+        </p:style>
+        <p:txBody>
+          <a:bodyPr rtlCol="0" anchor="ctr" wrap="none" lIns="88900" rIns="88900" tIns="12700" bIns="12700"/>
+          <a:lstStyle/>
+          <a:p>
+            <a:pPr algn="ctr"/>
+            <a:r>
+              <a:rPr sz="1100" b="1">
+                <a:solidFill>
+                  <a:srgbClr val="D64550"/>
+                </a:solidFill>
+                <a:latin typeface="Inter"/>
+              </a:rPr>
+              <a:t>REPASO</a:t>
+            </a:r>
+          </a:p>
+        </p:txBody>
+      </p:sp>
+      <p:sp>
+        <p:nvSpPr>
+          <p:cNvPr id="6" name="TextBox 5"/>
           <p:cNvSpPr txBox="1"/>
           <p:nvPr/>
         </p:nvSpPr>
         <p:spPr>
           <a:xfrm>
-            <a:off x="548640" y="457200"/>
-            <a:ext cx="10972800" cy="640080"/>
+            <a:off x="457200" y="457200"/>
+            <a:ext cx="9692640" cy="502920"/>
+          </a:xfrm>
+          <a:prstGeom prst="rect">
+            <a:avLst/>
+          </a:prstGeom>
+          <a:noFill/>
+        </p:spPr>
+        <p:txBody>
+          <a:bodyPr wrap="square" anchor="ctr" lIns="38100" rIns="38100" tIns="25400" bIns="25400">
+            <a:spAutoFit/>
+          </a:bodyPr>
+          <a:lstStyle/>
+          <a:p>
+            <a:pPr algn="l">
+              <a:lnSpc>
+                <a:spcPct val="106000"/>
+              </a:lnSpc>
+              <a:spcBef>
+                <a:spcPts val="0"/>
+              </a:spcBef>
+              <a:spcAft>
+                <a:spcPts val="200"/>
+              </a:spcAft>
+            </a:pPr>
+            <a:r>
+              <a:rPr sz="2700" b="1" i="0">
+                <a:solidFill>
+                  <a:srgbClr val="FFFFFF"/>
+                </a:solidFill>
+                <a:latin typeface="Bricolage Grotesque"/>
+              </a:rPr>
+              <a:t>Lo esencial de un vistazo</a:t>
+            </a:r>
+          </a:p>
+        </p:txBody>
+      </p:sp>
+      <p:sp>
+        <p:nvSpPr>
+          <p:cNvPr id="7" name="TextBox 6"/>
+          <p:cNvSpPr txBox="1"/>
+          <p:nvPr/>
+        </p:nvSpPr>
+        <p:spPr>
+          <a:xfrm>
+            <a:off x="502920" y="932688"/>
+            <a:ext cx="9692640" cy="274320"/>
           </a:xfrm>
           <a:prstGeom prst="rect">
             <a:avLst/>
@@ -9027,27 +9865,82 @@
               </a:spcAft>
             </a:pPr>
             <a:r>
-              <a:rPr sz="2200" b="1" i="0">
-                <a:solidFill>
-                  <a:srgbClr val="FFFFFF"/>
-                </a:solidFill>
-                <a:latin typeface="Bricolage Grotesque"/>
-              </a:rPr>
-              <a:t>Docentendossier · Unidad 3 «Nacionalidades y países»</a:t>
-            </a:r>
-          </a:p>
-        </p:txBody>
-      </p:sp>
-      <p:sp>
-        <p:nvSpPr>
-          <p:cNvPr id="4" name="TextBox 3"/>
+              <a:rPr sz="1250" b="0" i="1">
+                <a:solidFill>
+                  <a:srgbClr val="FBEAEC"/>
+                </a:solidFill>
+                <a:latin typeface="Inter"/>
+              </a:rPr>
+              <a:t>Wat je nu kunt — semáforo</a:t>
+            </a:r>
+          </a:p>
+        </p:txBody>
+      </p:sp>
+      <p:sp>
+        <p:nvSpPr>
+          <p:cNvPr id="8" name="Rounded Rectangle 7"/>
+          <p:cNvSpPr/>
+          <p:nvPr/>
+        </p:nvSpPr>
+        <p:spPr>
+          <a:xfrm>
+            <a:off x="502920" y="1554480"/>
+            <a:ext cx="6949440" cy="4023360"/>
+          </a:xfrm>
+          <a:prstGeom prst="roundRect">
+            <a:avLst>
+              <a:gd name="adj" fmla="val 5500"/>
+            </a:avLst>
+          </a:prstGeom>
+          <a:solidFill>
+            <a:srgbClr val="FFFFFF"/>
+          </a:solidFill>
+          <a:ln w="15240">
+            <a:solidFill>
+              <a:srgbClr val="E4E3DE"/>
+            </a:solidFill>
+          </a:ln>
+          <a:effectLst/>
+          <a:effectLst>
+            <a:outerShdw blurRad="90000" dist="38000" dir="5400000" rotWithShape="0">
+              <a:srgbClr val="20242E">
+                <a:alpha val="22000"/>
+              </a:srgbClr>
+            </a:outerShdw>
+          </a:effectLst>
+        </p:spPr>
+        <p:style>
+          <a:lnRef idx="1">
+            <a:schemeClr val="accent1"/>
+          </a:lnRef>
+          <a:fillRef idx="3">
+            <a:schemeClr val="accent1"/>
+          </a:fillRef>
+          <a:effectRef idx="2">
+            <a:schemeClr val="accent1"/>
+          </a:effectRef>
+          <a:fontRef idx="minor">
+            <a:schemeClr val="lt1"/>
+          </a:fontRef>
+        </p:style>
+        <p:txBody>
+          <a:bodyPr rtlCol="0" anchor="ctr"/>
+          <a:lstStyle/>
+          <a:p>
+            <a:pPr algn="ctr"/>
+          </a:p>
+        </p:txBody>
+      </p:sp>
+      <p:sp>
+        <p:nvSpPr>
+          <p:cNvPr id="9" name="TextBox 8"/>
           <p:cNvSpPr txBox="1"/>
           <p:nvPr/>
         </p:nvSpPr>
         <p:spPr>
           <a:xfrm>
-            <a:off x="548640" y="1280160"/>
-            <a:ext cx="11064240" cy="4937760"/>
+            <a:off x="777240" y="1737360"/>
+            <a:ext cx="6492240" cy="3657600"/>
           </a:xfrm>
           <a:prstGeom prst="rect">
             <a:avLst/>
@@ -9074,11 +9967,11 @@
             <a:r>
               <a:rPr sz="1400" b="1" i="0">
                 <a:solidFill>
-                  <a:srgbClr val="FBEAEC"/>
+                  <a:srgbClr val="A8323B"/>
                 </a:solidFill>
                 <a:latin typeface="Bricolage Grotesque"/>
               </a:rPr>
-              <a:t>Timing (2 lesuren van 50 min).</a:t>
+              <a:t>Zo vraag &amp; zeg je het origen</a:t>
             </a:r>
           </a:p>
           <a:p>
@@ -9094,13 +9987,13 @@
               </a:spcAft>
             </a:pPr>
             <a:r>
-              <a:rPr sz="1250" b="0" i="0">
-                <a:solidFill>
-                  <a:srgbClr val="ECEAE3"/>
-                </a:solidFill>
-                <a:latin typeface="Inter"/>
-              </a:rPr>
-              <a:t>Les 1: Escucha (sitcom ep. 3 · id 62GTD0QXbiI) + Suena bien (ñ · c/z · acento agudo) + Kit (¿de dónde eres? · soy de + país · gentilicio). Les 2: gramática functioneel (soy de + país · gentilicio ♂/♀), hablar, tarea «Mi mapa» + música.</a:t>
+              <a:rPr sz="1400" b="0" i="0">
+                <a:solidFill>
+                  <a:srgbClr val="20242E"/>
+                </a:solidFill>
+                <a:latin typeface="Inter"/>
+              </a:rPr>
+              <a:t>¿De dónde eres? → Soy de + país (Soy de Bélgica)</a:t>
             </a:r>
           </a:p>
           <a:p>
@@ -9116,6 +10009,28 @@
               </a:spcAft>
             </a:pPr>
             <a:r>
+              <a:rPr sz="1300" b="0" i="0">
+                <a:solidFill>
+                  <a:srgbClr val="20242E"/>
+                </a:solidFill>
+                <a:latin typeface="Inter"/>
+              </a:rPr>
+              <a:t>Land = met de · nationaliteit = zónder de (soy belga)</a:t>
+            </a:r>
+          </a:p>
+          <a:p>
+            <a:pPr algn="l">
+              <a:lnSpc>
+                <a:spcPct val="106000"/>
+              </a:lnSpc>
+              <a:spcBef>
+                <a:spcPts val="0"/>
+              </a:spcBef>
+              <a:spcAft>
+                <a:spcPts val="200"/>
+              </a:spcAft>
+            </a:pPr>
+            <a:r>
               <a:rPr sz="600" b="0" i="0">
                 <a:solidFill>
                   <a:srgbClr val="20242E"/>
@@ -9140,11 +10055,11 @@
             <a:r>
               <a:rPr sz="1400" b="1" i="0">
                 <a:solidFill>
-                  <a:srgbClr val="FBEAEC"/>
+                  <a:srgbClr val="A8323B"/>
                 </a:solidFill>
                 <a:latin typeface="Bricolage Grotesque"/>
               </a:rPr>
-              <a:t>Aanpak C4 (survival).</a:t>
+              <a:t>Nationaliteit &amp; talen</a:t>
             </a:r>
           </a:p>
           <a:p>
@@ -9160,13 +10075,13 @@
               </a:spcAft>
             </a:pPr>
             <a:r>
-              <a:rPr sz="1250" b="0" i="0">
-                <a:solidFill>
-                  <a:srgbClr val="ECEAE3"/>
-                </a:solidFill>
-                <a:latin typeface="Inter"/>
-              </a:rPr>
-              <a:t>Chunks komen auditief binnen (luisteren → naspreken). soy de + país en de gentilicio enkel functioneel (vaste vormen, herkennen), géén volledig ser-paradigma als systeem — dat is C5. Kernvalstrik: «soy DE Argelia» + kleine letter (soy español). Doelcodes: C4-SP-1 · C4-TS-3 · C4-CU-1 · C4-MEC-1/2 · C4-WS-1.</a:t>
+              <a:rPr sz="1300" b="0" i="0">
+                <a:solidFill>
+                  <a:srgbClr val="20242E"/>
+                </a:solidFill>
+                <a:latin typeface="Inter"/>
+              </a:rPr>
+              <a:t>mexicano ♂ / mexicana ♀ · met kleine letter</a:t>
             </a:r>
           </a:p>
           <a:p>
@@ -9182,13 +10097,13 @@
               </a:spcAft>
             </a:pPr>
             <a:r>
-              <a:rPr sz="600" b="0" i="0">
+              <a:rPr sz="1300" b="0" i="0">
                 <a:solidFill>
                   <a:srgbClr val="20242E"/>
                 </a:solidFill>
                 <a:latin typeface="Inter"/>
               </a:rPr>
-              <a:t/>
+              <a:t>Hablo español, neerlandés, francés…</a:t>
             </a:r>
           </a:p>
           <a:p>
@@ -9204,15 +10119,138 @@
               </a:spcAft>
             </a:pPr>
             <a:r>
-              <a:rPr sz="1400" b="1" i="0">
-                <a:solidFill>
-                  <a:srgbClr val="FBEAEC"/>
+              <a:rPr sz="1300" b="0" i="0">
+                <a:solidFill>
+                  <a:srgbClr val="20242E"/>
+                </a:solidFill>
+                <a:latin typeface="Inter"/>
+              </a:rPr>
+              <a:t>belga · marroquí blijven gelijk (♂ = ♀)</a:t>
+            </a:r>
+          </a:p>
+        </p:txBody>
+      </p:sp>
+      <p:sp>
+        <p:nvSpPr>
+          <p:cNvPr id="10" name="Rounded Rectangle 9"/>
+          <p:cNvSpPr/>
+          <p:nvPr/>
+        </p:nvSpPr>
+        <p:spPr>
+          <a:xfrm>
+            <a:off x="7680960" y="1554480"/>
+            <a:ext cx="4023360" cy="4023360"/>
+          </a:xfrm>
+          <a:prstGeom prst="roundRect">
+            <a:avLst>
+              <a:gd name="adj" fmla="val 5500"/>
+            </a:avLst>
+          </a:prstGeom>
+          <a:solidFill>
+            <a:srgbClr val="FBEAEC"/>
+          </a:solidFill>
+          <a:ln w="15240">
+            <a:solidFill>
+              <a:srgbClr val="D64550"/>
+            </a:solidFill>
+          </a:ln>
+          <a:effectLst/>
+          <a:effectLst>
+            <a:outerShdw blurRad="90000" dist="38000" dir="5400000" rotWithShape="0">
+              <a:srgbClr val="20242E">
+                <a:alpha val="22000"/>
+              </a:srgbClr>
+            </a:outerShdw>
+          </a:effectLst>
+        </p:spPr>
+        <p:style>
+          <a:lnRef idx="1">
+            <a:schemeClr val="accent1"/>
+          </a:lnRef>
+          <a:fillRef idx="3">
+            <a:schemeClr val="accent1"/>
+          </a:fillRef>
+          <a:effectRef idx="2">
+            <a:schemeClr val="accent1"/>
+          </a:effectRef>
+          <a:fontRef idx="minor">
+            <a:schemeClr val="lt1"/>
+          </a:fontRef>
+        </p:style>
+        <p:txBody>
+          <a:bodyPr rtlCol="0" anchor="ctr"/>
+          <a:lstStyle/>
+          <a:p>
+            <a:pPr algn="ctr"/>
+          </a:p>
+        </p:txBody>
+      </p:sp>
+      <p:sp>
+        <p:nvSpPr>
+          <p:cNvPr id="11" name="TextBox 10"/>
+          <p:cNvSpPr txBox="1"/>
+          <p:nvPr/>
+        </p:nvSpPr>
+        <p:spPr>
+          <a:xfrm>
+            <a:off x="7909560" y="1737360"/>
+            <a:ext cx="3566160" cy="457200"/>
+          </a:xfrm>
+          <a:prstGeom prst="rect">
+            <a:avLst/>
+          </a:prstGeom>
+          <a:noFill/>
+        </p:spPr>
+        <p:txBody>
+          <a:bodyPr wrap="square" anchor="t" lIns="38100" rIns="38100" tIns="25400" bIns="25400">
+            <a:spAutoFit/>
+          </a:bodyPr>
+          <a:lstStyle/>
+          <a:p>
+            <a:pPr algn="l">
+              <a:lnSpc>
+                <a:spcPct val="106000"/>
+              </a:lnSpc>
+              <a:spcBef>
+                <a:spcPts val="0"/>
+              </a:spcBef>
+              <a:spcAft>
+                <a:spcPts val="200"/>
+              </a:spcAft>
+            </a:pPr>
+            <a:r>
+              <a:rPr sz="1300" b="1" i="0">
+                <a:solidFill>
+                  <a:srgbClr val="A8323B"/>
                 </a:solidFill>
                 <a:latin typeface="Bricolage Grotesque"/>
               </a:rPr>
-              <a:t>Evaluatie.</a:t>
-            </a:r>
-          </a:p>
+              <a:t>Puedo… · Ik kan…</a:t>
+            </a:r>
+          </a:p>
+        </p:txBody>
+      </p:sp>
+      <p:sp>
+        <p:nvSpPr>
+          <p:cNvPr id="12" name="TextBox 11"/>
+          <p:cNvSpPr txBox="1"/>
+          <p:nvPr/>
+        </p:nvSpPr>
+        <p:spPr>
+          <a:xfrm>
+            <a:off x="7909560" y="2331720"/>
+            <a:ext cx="3566160" cy="640080"/>
+          </a:xfrm>
+          <a:prstGeom prst="rect">
+            <a:avLst/>
+          </a:prstGeom>
+          <a:noFill/>
+        </p:spPr>
+        <p:txBody>
+          <a:bodyPr wrap="square" anchor="t" lIns="38100" rIns="38100" tIns="25400" bIns="25400">
+            <a:spAutoFit/>
+          </a:bodyPr>
+          <a:lstStyle/>
           <a:p>
             <a:pPr algn="l">
               <a:lnSpc>
@@ -9226,15 +10264,47 @@
               </a:spcAft>
             </a:pPr>
             <a:r>
-              <a:rPr sz="1250" b="0" i="0">
-                <a:solidFill>
-                  <a:srgbClr val="ECEAE3"/>
-                </a:solidFill>
-                <a:latin typeface="Inter"/>
-              </a:rPr>
-              <a:t>Mondelinge mini-taak («Mi mapa»: 3 personen op de kaart met país + nacionalidad + idioma) + herkennen país/gentilicio/idioma. Geen leerplan → focus op «kunnen gebruiken in de praktijk».</a:t>
-            </a:r>
-          </a:p>
+              <a:rPr sz="1200" b="0" i="0">
+                <a:solidFill>
+                  <a:srgbClr val="20242E"/>
+                </a:solidFill>
+                <a:latin typeface="Inter"/>
+              </a:rPr>
+              <a:t>🟢🟡🔴  </a:t>
+            </a:r>
+            <a:r>
+              <a:rPr sz="1200" b="0" i="0">
+                <a:solidFill>
+                  <a:srgbClr val="20242E"/>
+                </a:solidFill>
+                <a:latin typeface="Inter"/>
+              </a:rPr>
+              <a:t>het origen vragen &amp; zeggen (soy de + país)</a:t>
+            </a:r>
+          </a:p>
+        </p:txBody>
+      </p:sp>
+      <p:sp>
+        <p:nvSpPr>
+          <p:cNvPr id="13" name="TextBox 12"/>
+          <p:cNvSpPr txBox="1"/>
+          <p:nvPr/>
+        </p:nvSpPr>
+        <p:spPr>
+          <a:xfrm>
+            <a:off x="7909560" y="2990088"/>
+            <a:ext cx="3566160" cy="640080"/>
+          </a:xfrm>
+          <a:prstGeom prst="rect">
+            <a:avLst/>
+          </a:prstGeom>
+          <a:noFill/>
+        </p:spPr>
+        <p:txBody>
+          <a:bodyPr wrap="square" anchor="t" lIns="38100" rIns="38100" tIns="25400" bIns="25400">
+            <a:spAutoFit/>
+          </a:bodyPr>
+          <a:lstStyle/>
           <a:p>
             <a:pPr algn="l">
               <a:lnSpc>
@@ -9248,15 +10318,47 @@
               </a:spcAft>
             </a:pPr>
             <a:r>
-              <a:rPr sz="600" b="0" i="0">
+              <a:rPr sz="1200" b="0" i="0">
                 <a:solidFill>
                   <a:srgbClr val="20242E"/>
                 </a:solidFill>
                 <a:latin typeface="Inter"/>
               </a:rPr>
-              <a:t/>
-            </a:r>
-          </a:p>
+              <a:t>🟢🟡🔴  </a:t>
+            </a:r>
+            <a:r>
+              <a:rPr sz="1200" b="0" i="0">
+                <a:solidFill>
+                  <a:srgbClr val="20242E"/>
+                </a:solidFill>
+                <a:latin typeface="Inter"/>
+              </a:rPr>
+              <a:t>de nationaliteit geven (♂/♀, kleine letter)</a:t>
+            </a:r>
+          </a:p>
+        </p:txBody>
+      </p:sp>
+      <p:sp>
+        <p:nvSpPr>
+          <p:cNvPr id="14" name="TextBox 13"/>
+          <p:cNvSpPr txBox="1"/>
+          <p:nvPr/>
+        </p:nvSpPr>
+        <p:spPr>
+          <a:xfrm>
+            <a:off x="7909560" y="3648456"/>
+            <a:ext cx="3566160" cy="640080"/>
+          </a:xfrm>
+          <a:prstGeom prst="rect">
+            <a:avLst/>
+          </a:prstGeom>
+          <a:noFill/>
+        </p:spPr>
+        <p:txBody>
+          <a:bodyPr wrap="square" anchor="t" lIns="38100" rIns="38100" tIns="25400" bIns="25400">
+            <a:spAutoFit/>
+          </a:bodyPr>
+          <a:lstStyle/>
           <a:p>
             <a:pPr algn="l">
               <a:lnSpc>
@@ -9270,20 +10372,150 @@
               </a:spcAft>
             </a:pPr>
             <a:r>
-              <a:rPr sz="1150" b="0" i="1">
-                <a:solidFill>
-                  <a:srgbClr val="A6A29A"/>
-                </a:solidFill>
-                <a:latin typeface="Inter"/>
-              </a:rPr>
-              <a:t>Oplossingen staan bij elke oefendia in de presenter-notities; antwoorden verschijnen bij klik.</a:t>
-            </a:r>
-          </a:p>
-        </p:txBody>
-      </p:sp>
-      <p:sp>
-        <p:nvSpPr>
-          <p:cNvPr id="5" name="Rectangle 4"/>
+              <a:rPr sz="1200" b="0" i="0">
+                <a:solidFill>
+                  <a:srgbClr val="20242E"/>
+                </a:solidFill>
+                <a:latin typeface="Inter"/>
+              </a:rPr>
+              <a:t>🟢🟡🔴  </a:t>
+            </a:r>
+            <a:r>
+              <a:rPr sz="1200" b="0" i="0">
+                <a:solidFill>
+                  <a:srgbClr val="20242E"/>
+                </a:solidFill>
+                <a:latin typeface="Inter"/>
+              </a:rPr>
+              <a:t>zeggen welke talen ik spreek (hablo…)</a:t>
+            </a:r>
+          </a:p>
+        </p:txBody>
+      </p:sp>
+      <p:sp>
+        <p:nvSpPr>
+          <p:cNvPr id="15" name="TextBox 14"/>
+          <p:cNvSpPr txBox="1"/>
+          <p:nvPr/>
+        </p:nvSpPr>
+        <p:spPr>
+          <a:xfrm>
+            <a:off x="7909560" y="4306824"/>
+            <a:ext cx="3566160" cy="640080"/>
+          </a:xfrm>
+          <a:prstGeom prst="rect">
+            <a:avLst/>
+          </a:prstGeom>
+          <a:noFill/>
+        </p:spPr>
+        <p:txBody>
+          <a:bodyPr wrap="square" anchor="t" lIns="38100" rIns="38100" tIns="25400" bIns="25400">
+            <a:spAutoFit/>
+          </a:bodyPr>
+          <a:lstStyle/>
+          <a:p>
+            <a:pPr algn="l">
+              <a:lnSpc>
+                <a:spcPct val="106000"/>
+              </a:lnSpc>
+              <a:spcBef>
+                <a:spcPts val="0"/>
+              </a:spcBef>
+              <a:spcAft>
+                <a:spcPts val="200"/>
+              </a:spcAft>
+            </a:pPr>
+            <a:r>
+              <a:rPr sz="1200" b="0" i="0">
+                <a:solidFill>
+                  <a:srgbClr val="20242E"/>
+                </a:solidFill>
+                <a:latin typeface="Inter"/>
+              </a:rPr>
+              <a:t>🟢🟡🔴  </a:t>
+            </a:r>
+            <a:r>
+              <a:rPr sz="1200" b="0" i="0">
+                <a:solidFill>
+                  <a:srgbClr val="20242E"/>
+                </a:solidFill>
+                <a:latin typeface="Inter"/>
+              </a:rPr>
+              <a:t>landen van het mundo hispano situeren</a:t>
+            </a:r>
+          </a:p>
+        </p:txBody>
+      </p:sp>
+      <p:sp>
+        <p:nvSpPr>
+          <p:cNvPr id="16" name="TextBox 15"/>
+          <p:cNvSpPr txBox="1"/>
+          <p:nvPr/>
+        </p:nvSpPr>
+        <p:spPr>
+          <a:xfrm>
+            <a:off x="7909560" y="5029200"/>
+            <a:ext cx="3566160" cy="640080"/>
+          </a:xfrm>
+          <a:prstGeom prst="rect">
+            <a:avLst/>
+          </a:prstGeom>
+          <a:noFill/>
+        </p:spPr>
+        <p:txBody>
+          <a:bodyPr wrap="square" anchor="t" lIns="38100" rIns="38100" tIns="25400" bIns="25400">
+            <a:spAutoFit/>
+          </a:bodyPr>
+          <a:lstStyle/>
+          <a:p>
+            <a:pPr algn="l">
+              <a:lnSpc>
+                <a:spcPct val="106000"/>
+              </a:lnSpc>
+              <a:spcBef>
+                <a:spcPts val="0"/>
+              </a:spcBef>
+              <a:spcAft>
+                <a:spcPts val="200"/>
+              </a:spcAft>
+            </a:pPr>
+            <a:r>
+              <a:rPr sz="1200" b="1" i="0">
+                <a:solidFill>
+                  <a:srgbClr val="A8323B"/>
+                </a:solidFill>
+                <a:latin typeface="Bricolage Grotesque"/>
+              </a:rPr>
+              <a:t>🎮 Repasa jugando</a:t>
+            </a:r>
+          </a:p>
+          <a:p>
+            <a:pPr algn="l">
+              <a:lnSpc>
+                <a:spcPct val="106000"/>
+              </a:lnSpc>
+              <a:spcBef>
+                <a:spcPts val="0"/>
+              </a:spcBef>
+              <a:spcAft>
+                <a:spcPts val="200"/>
+              </a:spcAft>
+            </a:pPr>
+            <a:r>
+              <a:rPr sz="1100" b="0" i="1">
+                <a:solidFill>
+                  <a:srgbClr val="6A6E78"/>
+                </a:solidFill>
+                <a:latin typeface="Inter"/>
+              </a:rPr>
+              <a:t>online op de hub · wereldkaart</a:t>
+            </a:r>
+          </a:p>
+        </p:txBody>
+      </p:sp>
+      <p:sp>
+        <p:nvSpPr>
+          <p:cNvPr id="17" name="Rectangle 16"/>
           <p:cNvSpPr/>
           <p:nvPr/>
         </p:nvSpPr>
@@ -9327,7 +10559,7 @@
       </p:sp>
       <p:sp>
         <p:nvSpPr>
-          <p:cNvPr id="6" name="TextBox 5"/>
+          <p:cNvPr id="18" name="TextBox 17"/>
           <p:cNvSpPr txBox="1"/>
           <p:nvPr/>
         </p:nvSpPr>
@@ -9381,7 +10613,7 @@
       </p:sp>
       <p:sp>
         <p:nvSpPr>
-          <p:cNvPr id="7" name="TextBox 6"/>
+          <p:cNvPr id="19" name="TextBox 18"/>
           <p:cNvSpPr txBox="1"/>
           <p:nvPr/>
         </p:nvSpPr>
@@ -9426,7 +10658,7 @@
       </p:sp>
       <p:sp>
         <p:nvSpPr>
-          <p:cNvPr id="8" name="TextBox 7"/>
+          <p:cNvPr id="20" name="TextBox 19"/>
           <p:cNvSpPr txBox="1"/>
           <p:nvPr/>
         </p:nvSpPr>
@@ -9465,6 +10697,544 @@
                 <a:latin typeface="Inter"/>
               </a:rPr>
               <a:t>14</a:t>
+            </a:r>
+          </a:p>
+        </p:txBody>
+      </p:sp>
+    </p:spTree>
+  </p:cSld>
+  <p:clrMapOvr>
+    <a:masterClrMapping/>
+  </p:clrMapOvr>
+</p:sld>
+</file>
+
+<file path=ppt/slides/slide15.xml><?xml version="1.0" encoding="utf-8"?>
+<p:sld xmlns:a="http://schemas.openxmlformats.org/drawingml/2006/main" xmlns:p="http://schemas.openxmlformats.org/presentationml/2006/main" xmlns:r="http://schemas.openxmlformats.org/officeDocument/2006/relationships">
+  <p:cSld>
+    <p:spTree>
+      <p:nvGrpSpPr>
+        <p:cNvPr id="1" name=""/>
+        <p:cNvGrpSpPr/>
+        <p:nvPr/>
+      </p:nvGrpSpPr>
+      <p:grpSpPr/>
+      <p:sp>
+        <p:nvSpPr>
+          <p:cNvPr id="2" name="Rectangle 1"/>
+          <p:cNvSpPr/>
+          <p:nvPr/>
+        </p:nvSpPr>
+        <p:spPr>
+          <a:xfrm>
+            <a:off x="0" y="0"/>
+            <a:ext cx="12191695" cy="6858000"/>
+          </a:xfrm>
+          <a:prstGeom prst="rect">
+            <a:avLst/>
+          </a:prstGeom>
+          <a:solidFill>
+            <a:srgbClr val="241C1B"/>
+          </a:solidFill>
+          <a:ln>
+            <a:noFill/>
+          </a:ln>
+          <a:effectLst/>
+        </p:spPr>
+        <p:style>
+          <a:lnRef idx="1">
+            <a:schemeClr val="accent1"/>
+          </a:lnRef>
+          <a:fillRef idx="3">
+            <a:schemeClr val="accent1"/>
+          </a:fillRef>
+          <a:effectRef idx="2">
+            <a:schemeClr val="accent1"/>
+          </a:effectRef>
+          <a:fontRef idx="minor">
+            <a:schemeClr val="lt1"/>
+          </a:fontRef>
+        </p:style>
+        <p:txBody>
+          <a:bodyPr rtlCol="0" anchor="ctr"/>
+          <a:lstStyle/>
+          <a:p>
+            <a:pPr algn="ctr"/>
+          </a:p>
+        </p:txBody>
+      </p:sp>
+      <p:sp>
+        <p:nvSpPr>
+          <p:cNvPr id="3" name="TextBox 2"/>
+          <p:cNvSpPr txBox="1"/>
+          <p:nvPr/>
+        </p:nvSpPr>
+        <p:spPr>
+          <a:xfrm>
+            <a:off x="548640" y="457200"/>
+            <a:ext cx="10972800" cy="640080"/>
+          </a:xfrm>
+          <a:prstGeom prst="rect">
+            <a:avLst/>
+          </a:prstGeom>
+          <a:noFill/>
+        </p:spPr>
+        <p:txBody>
+          <a:bodyPr wrap="square" anchor="t" lIns="38100" rIns="38100" tIns="25400" bIns="25400">
+            <a:spAutoFit/>
+          </a:bodyPr>
+          <a:lstStyle/>
+          <a:p>
+            <a:pPr algn="l">
+              <a:lnSpc>
+                <a:spcPct val="106000"/>
+              </a:lnSpc>
+              <a:spcBef>
+                <a:spcPts val="0"/>
+              </a:spcBef>
+              <a:spcAft>
+                <a:spcPts val="200"/>
+              </a:spcAft>
+            </a:pPr>
+            <a:r>
+              <a:rPr sz="2200" b="1" i="0">
+                <a:solidFill>
+                  <a:srgbClr val="FFFFFF"/>
+                </a:solidFill>
+                <a:latin typeface="Bricolage Grotesque"/>
+              </a:rPr>
+              <a:t>Docentendossier · Unidad 3 «Nacionalidades y países»</a:t>
+            </a:r>
+          </a:p>
+        </p:txBody>
+      </p:sp>
+      <p:sp>
+        <p:nvSpPr>
+          <p:cNvPr id="4" name="TextBox 3"/>
+          <p:cNvSpPr txBox="1"/>
+          <p:nvPr/>
+        </p:nvSpPr>
+        <p:spPr>
+          <a:xfrm>
+            <a:off x="548640" y="1280160"/>
+            <a:ext cx="11064240" cy="4937760"/>
+          </a:xfrm>
+          <a:prstGeom prst="rect">
+            <a:avLst/>
+          </a:prstGeom>
+          <a:noFill/>
+        </p:spPr>
+        <p:txBody>
+          <a:bodyPr wrap="square" anchor="t" lIns="38100" rIns="38100" tIns="25400" bIns="25400">
+            <a:spAutoFit/>
+          </a:bodyPr>
+          <a:lstStyle/>
+          <a:p>
+            <a:pPr algn="l">
+              <a:lnSpc>
+                <a:spcPct val="106000"/>
+              </a:lnSpc>
+              <a:spcBef>
+                <a:spcPts val="0"/>
+              </a:spcBef>
+              <a:spcAft>
+                <a:spcPts val="200"/>
+              </a:spcAft>
+            </a:pPr>
+            <a:r>
+              <a:rPr sz="1400" b="1" i="0">
+                <a:solidFill>
+                  <a:srgbClr val="FBEAEC"/>
+                </a:solidFill>
+                <a:latin typeface="Bricolage Grotesque"/>
+              </a:rPr>
+              <a:t>Timing (2 lesuren van 50 min).</a:t>
+            </a:r>
+          </a:p>
+          <a:p>
+            <a:pPr algn="l">
+              <a:lnSpc>
+                <a:spcPct val="106000"/>
+              </a:lnSpc>
+              <a:spcBef>
+                <a:spcPts val="0"/>
+              </a:spcBef>
+              <a:spcAft>
+                <a:spcPts val="200"/>
+              </a:spcAft>
+            </a:pPr>
+            <a:r>
+              <a:rPr sz="1250" b="0" i="0">
+                <a:solidFill>
+                  <a:srgbClr val="ECEAE3"/>
+                </a:solidFill>
+                <a:latin typeface="Inter"/>
+              </a:rPr>
+              <a:t>Les 1: Escucha (sitcom ep. 3 · id 62GTD0QXbiI) + Suena bien (ñ · c/z · acento agudo) + Kit (¿de dónde eres? · soy de + país · gentilicio). Les 2: gramática functioneel (soy de + país · gentilicio ♂/♀), hablar, tarea «Mi mapa» + música.</a:t>
+            </a:r>
+          </a:p>
+          <a:p>
+            <a:pPr algn="l">
+              <a:lnSpc>
+                <a:spcPct val="106000"/>
+              </a:lnSpc>
+              <a:spcBef>
+                <a:spcPts val="0"/>
+              </a:spcBef>
+              <a:spcAft>
+                <a:spcPts val="200"/>
+              </a:spcAft>
+            </a:pPr>
+            <a:r>
+              <a:rPr sz="600" b="0" i="0">
+                <a:solidFill>
+                  <a:srgbClr val="20242E"/>
+                </a:solidFill>
+                <a:latin typeface="Inter"/>
+              </a:rPr>
+              <a:t/>
+            </a:r>
+          </a:p>
+          <a:p>
+            <a:pPr algn="l">
+              <a:lnSpc>
+                <a:spcPct val="106000"/>
+              </a:lnSpc>
+              <a:spcBef>
+                <a:spcPts val="0"/>
+              </a:spcBef>
+              <a:spcAft>
+                <a:spcPts val="200"/>
+              </a:spcAft>
+            </a:pPr>
+            <a:r>
+              <a:rPr sz="1400" b="1" i="0">
+                <a:solidFill>
+                  <a:srgbClr val="FBEAEC"/>
+                </a:solidFill>
+                <a:latin typeface="Bricolage Grotesque"/>
+              </a:rPr>
+              <a:t>Aanpak C4 (survival).</a:t>
+            </a:r>
+          </a:p>
+          <a:p>
+            <a:pPr algn="l">
+              <a:lnSpc>
+                <a:spcPct val="106000"/>
+              </a:lnSpc>
+              <a:spcBef>
+                <a:spcPts val="0"/>
+              </a:spcBef>
+              <a:spcAft>
+                <a:spcPts val="200"/>
+              </a:spcAft>
+            </a:pPr>
+            <a:r>
+              <a:rPr sz="1250" b="0" i="0">
+                <a:solidFill>
+                  <a:srgbClr val="ECEAE3"/>
+                </a:solidFill>
+                <a:latin typeface="Inter"/>
+              </a:rPr>
+              <a:t>Chunks komen auditief binnen (luisteren → naspreken). soy de + país en de gentilicio enkel functioneel (vaste vormen, herkennen), géén volledig ser-paradigma als systeem — dat is C5. Kernvalstrik: «soy DE Argelia» + kleine letter (soy español). Doelcodes: C4-SP-1 · C4-TS-3 · C4-CU-1 · C4-MEC-1/2 · C4-WS-1.</a:t>
+            </a:r>
+          </a:p>
+          <a:p>
+            <a:pPr algn="l">
+              <a:lnSpc>
+                <a:spcPct val="106000"/>
+              </a:lnSpc>
+              <a:spcBef>
+                <a:spcPts val="0"/>
+              </a:spcBef>
+              <a:spcAft>
+                <a:spcPts val="200"/>
+              </a:spcAft>
+            </a:pPr>
+            <a:r>
+              <a:rPr sz="600" b="0" i="0">
+                <a:solidFill>
+                  <a:srgbClr val="20242E"/>
+                </a:solidFill>
+                <a:latin typeface="Inter"/>
+              </a:rPr>
+              <a:t/>
+            </a:r>
+          </a:p>
+          <a:p>
+            <a:pPr algn="l">
+              <a:lnSpc>
+                <a:spcPct val="106000"/>
+              </a:lnSpc>
+              <a:spcBef>
+                <a:spcPts val="0"/>
+              </a:spcBef>
+              <a:spcAft>
+                <a:spcPts val="200"/>
+              </a:spcAft>
+            </a:pPr>
+            <a:r>
+              <a:rPr sz="1400" b="1" i="0">
+                <a:solidFill>
+                  <a:srgbClr val="FBEAEC"/>
+                </a:solidFill>
+                <a:latin typeface="Bricolage Grotesque"/>
+              </a:rPr>
+              <a:t>Evaluatie.</a:t>
+            </a:r>
+          </a:p>
+          <a:p>
+            <a:pPr algn="l">
+              <a:lnSpc>
+                <a:spcPct val="106000"/>
+              </a:lnSpc>
+              <a:spcBef>
+                <a:spcPts val="0"/>
+              </a:spcBef>
+              <a:spcAft>
+                <a:spcPts val="200"/>
+              </a:spcAft>
+            </a:pPr>
+            <a:r>
+              <a:rPr sz="1250" b="0" i="0">
+                <a:solidFill>
+                  <a:srgbClr val="ECEAE3"/>
+                </a:solidFill>
+                <a:latin typeface="Inter"/>
+              </a:rPr>
+              <a:t>Mondelinge mini-taak («Mi mapa»: 3 personen op de kaart met país + nacionalidad + idioma) + herkennen país/gentilicio/idioma. Geen leerplan → focus op «kunnen gebruiken in de praktijk».</a:t>
+            </a:r>
+          </a:p>
+          <a:p>
+            <a:pPr algn="l">
+              <a:lnSpc>
+                <a:spcPct val="106000"/>
+              </a:lnSpc>
+              <a:spcBef>
+                <a:spcPts val="0"/>
+              </a:spcBef>
+              <a:spcAft>
+                <a:spcPts val="200"/>
+              </a:spcAft>
+            </a:pPr>
+            <a:r>
+              <a:rPr sz="600" b="0" i="0">
+                <a:solidFill>
+                  <a:srgbClr val="20242E"/>
+                </a:solidFill>
+                <a:latin typeface="Inter"/>
+              </a:rPr>
+              <a:t/>
+            </a:r>
+          </a:p>
+          <a:p>
+            <a:pPr algn="l">
+              <a:lnSpc>
+                <a:spcPct val="106000"/>
+              </a:lnSpc>
+              <a:spcBef>
+                <a:spcPts val="0"/>
+              </a:spcBef>
+              <a:spcAft>
+                <a:spcPts val="200"/>
+              </a:spcAft>
+            </a:pPr>
+            <a:r>
+              <a:rPr sz="1150" b="0" i="1">
+                <a:solidFill>
+                  <a:srgbClr val="A6A29A"/>
+                </a:solidFill>
+                <a:latin typeface="Inter"/>
+              </a:rPr>
+              <a:t>Oplossingen staan bij elke oefendia in de presenter-notities; antwoorden verschijnen bij klik.</a:t>
+            </a:r>
+          </a:p>
+        </p:txBody>
+      </p:sp>
+      <p:sp>
+        <p:nvSpPr>
+          <p:cNvPr id="5" name="Rectangle 4"/>
+          <p:cNvSpPr/>
+          <p:nvPr/>
+        </p:nvSpPr>
+        <p:spPr>
+          <a:xfrm>
+            <a:off x="0" y="6547104"/>
+            <a:ext cx="12191695" cy="310896"/>
+          </a:xfrm>
+          <a:prstGeom prst="rect">
+            <a:avLst/>
+          </a:prstGeom>
+          <a:solidFill>
+            <a:srgbClr val="F3EEE4"/>
+          </a:solidFill>
+          <a:ln>
+            <a:noFill/>
+          </a:ln>
+          <a:effectLst/>
+        </p:spPr>
+        <p:style>
+          <a:lnRef idx="1">
+            <a:schemeClr val="accent1"/>
+          </a:lnRef>
+          <a:fillRef idx="3">
+            <a:schemeClr val="accent1"/>
+          </a:fillRef>
+          <a:effectRef idx="2">
+            <a:schemeClr val="accent1"/>
+          </a:effectRef>
+          <a:fontRef idx="minor">
+            <a:schemeClr val="lt1"/>
+          </a:fontRef>
+        </p:style>
+        <p:txBody>
+          <a:bodyPr rtlCol="0" anchor="ctr"/>
+          <a:lstStyle/>
+          <a:p>
+            <a:pPr algn="ctr"/>
+          </a:p>
+        </p:txBody>
+      </p:sp>
+      <p:sp>
+        <p:nvSpPr>
+          <p:cNvPr id="6" name="TextBox 5"/>
+          <p:cNvSpPr txBox="1"/>
+          <p:nvPr/>
+        </p:nvSpPr>
+        <p:spPr>
+          <a:xfrm>
+            <a:off x="411480" y="6565392"/>
+            <a:ext cx="5486400" cy="274320"/>
+          </a:xfrm>
+          <a:prstGeom prst="rect">
+            <a:avLst/>
+          </a:prstGeom>
+          <a:noFill/>
+        </p:spPr>
+        <p:txBody>
+          <a:bodyPr wrap="square" anchor="ctr" lIns="38100" rIns="38100" tIns="25400" bIns="25400">
+            <a:spAutoFit/>
+          </a:bodyPr>
+          <a:lstStyle/>
+          <a:p>
+            <a:pPr algn="l">
+              <a:lnSpc>
+                <a:spcPct val="106000"/>
+              </a:lnSpc>
+              <a:spcBef>
+                <a:spcPts val="0"/>
+              </a:spcBef>
+              <a:spcAft>
+                <a:spcPts val="200"/>
+              </a:spcAft>
+            </a:pPr>
+            <a:r>
+              <a:rPr sz="1100" b="1" i="0">
+                <a:solidFill>
+                  <a:srgbClr val="D64550"/>
+                </a:solidFill>
+                <a:latin typeface="Inter"/>
+              </a:rPr>
+              <a:t>● </a:t>
+            </a:r>
+            <a:r>
+              <a:rPr sz="950" b="0" i="0">
+                <a:solidFill>
+                  <a:srgbClr val="6A6E78"/>
+                </a:solidFill>
+                <a:latin typeface="Inter"/>
+              </a:rPr>
+              <a:t>U3 · NACIONALIDADES   ·   C4 · La Ruta</a:t>
+            </a:r>
+          </a:p>
+        </p:txBody>
+      </p:sp>
+      <p:sp>
+        <p:nvSpPr>
+          <p:cNvPr id="7" name="TextBox 6"/>
+          <p:cNvSpPr txBox="1"/>
+          <p:nvPr/>
+        </p:nvSpPr>
+        <p:spPr>
+          <a:xfrm>
+            <a:off x="8686800" y="6565392"/>
+            <a:ext cx="3063240" cy="274320"/>
+          </a:xfrm>
+          <a:prstGeom prst="rect">
+            <a:avLst/>
+          </a:prstGeom>
+          <a:noFill/>
+        </p:spPr>
+        <p:txBody>
+          <a:bodyPr wrap="square" anchor="ctr" lIns="38100" rIns="38100" tIns="25400" bIns="25400">
+            <a:spAutoFit/>
+          </a:bodyPr>
+          <a:lstStyle/>
+          <a:p>
+            <a:pPr algn="r">
+              <a:lnSpc>
+                <a:spcPct val="106000"/>
+              </a:lnSpc>
+              <a:spcBef>
+                <a:spcPts val="0"/>
+              </a:spcBef>
+              <a:spcAft>
+                <a:spcPts val="200"/>
+              </a:spcAft>
+            </a:pPr>
+            <a:r>
+              <a:rPr sz="900" b="0" i="1">
+                <a:solidFill>
+                  <a:srgbClr val="6A6E78"/>
+                </a:solidFill>
+                <a:latin typeface="Inter"/>
+              </a:rPr>
+              <a:t>Docentenversie — met oplossingen</a:t>
+            </a:r>
+          </a:p>
+        </p:txBody>
+      </p:sp>
+      <p:sp>
+        <p:nvSpPr>
+          <p:cNvPr id="8" name="TextBox 7"/>
+          <p:cNvSpPr txBox="1"/>
+          <p:nvPr/>
+        </p:nvSpPr>
+        <p:spPr>
+          <a:xfrm>
+            <a:off x="11475720" y="6565392"/>
+            <a:ext cx="457200" cy="274320"/>
+          </a:xfrm>
+          <a:prstGeom prst="rect">
+            <a:avLst/>
+          </a:prstGeom>
+          <a:noFill/>
+        </p:spPr>
+        <p:txBody>
+          <a:bodyPr wrap="square" anchor="ctr" lIns="38100" rIns="38100" tIns="25400" bIns="25400">
+            <a:spAutoFit/>
+          </a:bodyPr>
+          <a:lstStyle/>
+          <a:p>
+            <a:pPr algn="r">
+              <a:lnSpc>
+                <a:spcPct val="106000"/>
+              </a:lnSpc>
+              <a:spcBef>
+                <a:spcPts val="0"/>
+              </a:spcBef>
+              <a:spcAft>
+                <a:spcPts val="200"/>
+              </a:spcAft>
+            </a:pPr>
+            <a:r>
+              <a:rPr sz="950" b="1" i="0">
+                <a:solidFill>
+                  <a:srgbClr val="A8323B"/>
+                </a:solidFill>
+                <a:latin typeface="Inter"/>
+              </a:rPr>
+              <a:t>15</a:t>
             </a:r>
           </a:p>
         </p:txBody>

--- a/03-build/pptx/C4_U3_docente.pptx
+++ b/03-build/pptx/C4_U3_docente.pptx
@@ -4732,7 +4732,6 @@
               <a:srgbClr val="D64550"/>
             </a:solidFill>
           </a:ln>
-          <a:effectLst/>
           <a:effectLst>
             <a:outerShdw blurRad="90000" dist="38000" dir="5400000" rotWithShape="0">
               <a:srgbClr val="20242E">
@@ -4920,7 +4919,6 @@
               <a:srgbClr val="E4E3DE"/>
             </a:solidFill>
           </a:ln>
-          <a:effectLst/>
           <a:effectLst>
             <a:outerShdw blurRad="90000" dist="38000" dir="5400000" rotWithShape="0">
               <a:srgbClr val="20242E">
@@ -5645,7 +5643,6 @@
               <a:srgbClr val="E4E3DE"/>
             </a:solidFill>
           </a:ln>
-          <a:effectLst/>
           <a:effectLst>
             <a:outerShdw blurRad="90000" dist="38000" dir="5400000" rotWithShape="0">
               <a:srgbClr val="20242E">
@@ -5789,7 +5786,6 @@
               <a:srgbClr val="E4E3DE"/>
             </a:solidFill>
           </a:ln>
-          <a:effectLst/>
           <a:effectLst>
             <a:outerShdw blurRad="90000" dist="38000" dir="5400000" rotWithShape="0">
               <a:srgbClr val="20242E">
@@ -5933,7 +5929,6 @@
               <a:srgbClr val="E4E3DE"/>
             </a:solidFill>
           </a:ln>
-          <a:effectLst/>
           <a:effectLst>
             <a:outerShdw blurRad="90000" dist="38000" dir="5400000" rotWithShape="0">
               <a:srgbClr val="20242E">
@@ -6077,7 +6072,6 @@
               <a:srgbClr val="E4E3DE"/>
             </a:solidFill>
           </a:ln>
-          <a:effectLst/>
           <a:effectLst>
             <a:outerShdw blurRad="90000" dist="38000" dir="5400000" rotWithShape="0">
               <a:srgbClr val="20242E">
@@ -6221,7 +6215,6 @@
               <a:srgbClr val="E4E3DE"/>
             </a:solidFill>
           </a:ln>
-          <a:effectLst/>
           <a:effectLst>
             <a:outerShdw blurRad="90000" dist="38000" dir="5400000" rotWithShape="0">
               <a:srgbClr val="20242E">
@@ -6365,7 +6358,6 @@
               <a:srgbClr val="E4E3DE"/>
             </a:solidFill>
           </a:ln>
-          <a:effectLst/>
           <a:effectLst>
             <a:outerShdw blurRad="90000" dist="38000" dir="5400000" rotWithShape="0">
               <a:srgbClr val="20242E">
@@ -6509,7 +6501,6 @@
               <a:srgbClr val="D64550"/>
             </a:solidFill>
           </a:ln>
-          <a:effectLst/>
           <a:effectLst>
             <a:outerShdw blurRad="90000" dist="38000" dir="5400000" rotWithShape="0">
               <a:srgbClr val="20242E">
@@ -7146,7 +7137,6 @@
               <a:srgbClr val="D64550"/>
             </a:solidFill>
           </a:ln>
-          <a:effectLst/>
           <a:effectLst>
             <a:outerShdw blurRad="90000" dist="38000" dir="5400000" rotWithShape="0">
               <a:srgbClr val="20242E">
@@ -7406,7 +7396,6 @@
               <a:srgbClr val="D64550"/>
             </a:solidFill>
           </a:ln>
-          <a:effectLst/>
           <a:effectLst>
             <a:outerShdw blurRad="90000" dist="38000" dir="5400000" rotWithShape="0">
               <a:srgbClr val="20242E">
@@ -8185,7 +8174,6 @@
               <a:srgbClr val="E4E3DE"/>
             </a:solidFill>
           </a:ln>
-          <a:effectLst/>
           <a:effectLst>
             <a:outerShdw blurRad="90000" dist="38000" dir="5400000" rotWithShape="0">
               <a:srgbClr val="20242E">
@@ -8339,7 +8327,6 @@
               <a:srgbClr val="D64550"/>
             </a:solidFill>
           </a:ln>
-          <a:effectLst/>
           <a:effectLst>
             <a:outerShdw blurRad="90000" dist="38000" dir="5400000" rotWithShape="0">
               <a:srgbClr val="20242E">
@@ -8493,7 +8480,6 @@
               <a:srgbClr val="D64550"/>
             </a:solidFill>
           </a:ln>
-          <a:effectLst/>
           <a:effectLst>
             <a:outerShdw blurRad="90000" dist="38000" dir="5400000" rotWithShape="0">
               <a:srgbClr val="20242E">
@@ -8647,7 +8633,6 @@
               <a:srgbClr val="E4E3DE"/>
             </a:solidFill>
           </a:ln>
-          <a:effectLst/>
           <a:effectLst>
             <a:outerShdw blurRad="90000" dist="38000" dir="5400000" rotWithShape="0">
               <a:srgbClr val="20242E">
@@ -8801,7 +8786,6 @@
               <a:srgbClr val="E4E3DE"/>
             </a:solidFill>
           </a:ln>
-          <a:effectLst/>
           <a:effectLst>
             <a:outerShdw blurRad="90000" dist="38000" dir="5400000" rotWithShape="0">
               <a:srgbClr val="20242E">
@@ -8955,7 +8939,6 @@
               <a:srgbClr val="D64550"/>
             </a:solidFill>
           </a:ln>
-          <a:effectLst/>
           <a:effectLst>
             <a:outerShdw blurRad="90000" dist="38000" dir="5400000" rotWithShape="0">
               <a:srgbClr val="20242E">
@@ -9109,7 +9092,6 @@
               <a:srgbClr val="D64550"/>
             </a:solidFill>
           </a:ln>
-          <a:effectLst/>
           <a:effectLst>
             <a:outerShdw blurRad="90000" dist="38000" dir="5400000" rotWithShape="0">
               <a:srgbClr val="20242E">
@@ -9263,7 +9245,6 @@
               <a:srgbClr val="D64550"/>
             </a:solidFill>
           </a:ln>
-          <a:effectLst/>
           <a:effectLst>
             <a:outerShdw blurRad="90000" dist="38000" dir="5400000" rotWithShape="0">
               <a:srgbClr val="20242E">
@@ -9900,7 +9881,6 @@
               <a:srgbClr val="E4E3DE"/>
             </a:solidFill>
           </a:ln>
-          <a:effectLst/>
           <a:effectLst>
             <a:outerShdw blurRad="90000" dist="38000" dir="5400000" rotWithShape="0">
               <a:srgbClr val="20242E">
@@ -10154,7 +10134,6 @@
               <a:srgbClr val="D64550"/>
             </a:solidFill>
           </a:ln>
-          <a:effectLst/>
           <a:effectLst>
             <a:outerShdw blurRad="90000" dist="38000" dir="5400000" rotWithShape="0">
               <a:srgbClr val="20242E">
@@ -11560,7 +11539,6 @@
               <a:srgbClr val="E4E3DE"/>
             </a:solidFill>
           </a:ln>
-          <a:effectLst/>
           <a:effectLst>
             <a:outerShdw blurRad="90000" dist="38000" dir="5400000" rotWithShape="0">
               <a:srgbClr val="20242E">
@@ -11729,7 +11707,6 @@
               <a:srgbClr val="E4E3DE"/>
             </a:solidFill>
           </a:ln>
-          <a:effectLst/>
           <a:effectLst>
             <a:outerShdw blurRad="90000" dist="38000" dir="5400000" rotWithShape="0">
               <a:srgbClr val="20242E">
@@ -11898,7 +11875,6 @@
               <a:srgbClr val="E4E3DE"/>
             </a:solidFill>
           </a:ln>
-          <a:effectLst/>
           <a:effectLst>
             <a:outerShdw blurRad="90000" dist="38000" dir="5400000" rotWithShape="0">
               <a:srgbClr val="20242E">
@@ -12067,7 +12043,6 @@
               <a:srgbClr val="E4E3DE"/>
             </a:solidFill>
           </a:ln>
-          <a:effectLst/>
           <a:effectLst>
             <a:outerShdw blurRad="90000" dist="38000" dir="5400000" rotWithShape="0">
               <a:srgbClr val="20242E">
@@ -12236,7 +12211,6 @@
               <a:srgbClr val="E4E3DE"/>
             </a:solidFill>
           </a:ln>
-          <a:effectLst/>
           <a:effectLst>
             <a:outerShdw blurRad="90000" dist="38000" dir="5400000" rotWithShape="0">
               <a:srgbClr val="20242E">
@@ -12405,7 +12379,6 @@
               <a:srgbClr val="E4E3DE"/>
             </a:solidFill>
           </a:ln>
-          <a:effectLst/>
           <a:effectLst>
             <a:outerShdw blurRad="90000" dist="38000" dir="5400000" rotWithShape="0">
               <a:srgbClr val="20242E">
@@ -12574,7 +12547,6 @@
               <a:srgbClr val="E4E3DE"/>
             </a:solidFill>
           </a:ln>
-          <a:effectLst/>
           <a:effectLst>
             <a:outerShdw blurRad="90000" dist="38000" dir="5400000" rotWithShape="0">
               <a:srgbClr val="20242E">
@@ -12743,7 +12715,6 @@
               <a:srgbClr val="E4E3DE"/>
             </a:solidFill>
           </a:ln>
-          <a:effectLst/>
           <a:effectLst>
             <a:outerShdw blurRad="90000" dist="38000" dir="5400000" rotWithShape="0">
               <a:srgbClr val="20242E">
@@ -12912,7 +12883,6 @@
               <a:srgbClr val="E4E3DE"/>
             </a:solidFill>
           </a:ln>
-          <a:effectLst/>
           <a:effectLst>
             <a:outerShdw blurRad="90000" dist="38000" dir="5400000" rotWithShape="0">
               <a:srgbClr val="20242E">
@@ -13661,7 +13631,6 @@
               <a:srgbClr val="E4E3DE"/>
             </a:solidFill>
           </a:ln>
-          <a:effectLst/>
           <a:effectLst>
             <a:outerShdw blurRad="90000" dist="38000" dir="5400000" rotWithShape="0">
               <a:srgbClr val="20242E">
@@ -14516,7 +14485,6 @@
               <a:srgbClr val="D64550"/>
             </a:solidFill>
           </a:ln>
-          <a:effectLst/>
           <a:effectLst>
             <a:outerShdw blurRad="90000" dist="38000" dir="5400000" rotWithShape="0">
               <a:srgbClr val="20242E">
@@ -15265,7 +15233,6 @@
               <a:srgbClr val="E4E3DE"/>
             </a:solidFill>
           </a:ln>
-          <a:effectLst/>
           <a:effectLst>
             <a:outerShdw blurRad="90000" dist="38000" dir="5400000" rotWithShape="0">
               <a:srgbClr val="20242E">
@@ -15476,7 +15443,6 @@
               <a:srgbClr val="E4E3DE"/>
             </a:solidFill>
           </a:ln>
-          <a:effectLst/>
           <a:effectLst>
             <a:outerShdw blurRad="90000" dist="38000" dir="5400000" rotWithShape="0">
               <a:srgbClr val="20242E">
@@ -15687,7 +15653,6 @@
               <a:srgbClr val="D64550"/>
             </a:solidFill>
           </a:ln>
-          <a:effectLst/>
           <a:effectLst>
             <a:outerShdw blurRad="90000" dist="38000" dir="5400000" rotWithShape="0">
               <a:srgbClr val="20242E">
@@ -16522,7 +16487,6 @@
               <a:srgbClr val="E4E3DE"/>
             </a:solidFill>
           </a:ln>
-          <a:effectLst/>
           <a:effectLst>
             <a:outerShdw blurRad="90000" dist="38000" dir="5400000" rotWithShape="0">
               <a:srgbClr val="20242E">
@@ -16838,7 +16802,6 @@
               <a:srgbClr val="E4E3DE"/>
             </a:solidFill>
           </a:ln>
-          <a:effectLst/>
           <a:effectLst>
             <a:outerShdw blurRad="90000" dist="38000" dir="5400000" rotWithShape="0">
               <a:srgbClr val="20242E">
@@ -17208,7 +17171,6 @@
               <a:srgbClr val="E4E3DE"/>
             </a:solidFill>
           </a:ln>
-          <a:effectLst/>
           <a:effectLst>
             <a:outerShdw blurRad="90000" dist="38000" dir="5400000" rotWithShape="0">
               <a:srgbClr val="20242E">
@@ -18106,7 +18068,6 @@
               <a:srgbClr val="D64550"/>
             </a:solidFill>
           </a:ln>
-          <a:effectLst/>
           <a:effectLst>
             <a:outerShdw blurRad="90000" dist="38000" dir="5400000" rotWithShape="0">
               <a:srgbClr val="20242E">
@@ -18476,7 +18437,6 @@
               <a:srgbClr val="E4E3DE"/>
             </a:solidFill>
           </a:ln>
-          <a:effectLst/>
           <a:effectLst>
             <a:outerShdw blurRad="90000" dist="38000" dir="5400000" rotWithShape="0">
               <a:srgbClr val="20242E">
@@ -19928,7 +19888,6 @@
               <a:srgbClr val="E4E3DE"/>
             </a:solidFill>
           </a:ln>
-          <a:effectLst/>
           <a:effectLst>
             <a:outerShdw blurRad="90000" dist="38000" dir="5400000" rotWithShape="0">
               <a:srgbClr val="20242E">
@@ -20217,7 +20176,6 @@
               <a:srgbClr val="E4E3DE"/>
             </a:solidFill>
           </a:ln>
-          <a:effectLst/>
           <a:effectLst>
             <a:outerShdw blurRad="90000" dist="38000" dir="5400000" rotWithShape="0">
               <a:srgbClr val="20242E">
@@ -20533,7 +20491,6 @@
               <a:srgbClr val="D64550"/>
             </a:solidFill>
           </a:ln>
-          <a:effectLst/>
           <a:effectLst>
             <a:outerShdw blurRad="90000" dist="38000" dir="5400000" rotWithShape="0">
               <a:srgbClr val="20242E">
@@ -21646,7 +21603,6 @@
               <a:srgbClr val="E4E3DE"/>
             </a:solidFill>
           </a:ln>
-          <a:effectLst/>
           <a:effectLst>
             <a:outerShdw blurRad="90000" dist="38000" dir="5400000" rotWithShape="0">
               <a:srgbClr val="20242E">
@@ -21790,7 +21746,6 @@
               <a:srgbClr val="E4E3DE"/>
             </a:solidFill>
           </a:ln>
-          <a:effectLst/>
           <a:effectLst>
             <a:outerShdw blurRad="90000" dist="38000" dir="5400000" rotWithShape="0">
               <a:srgbClr val="20242E">
@@ -21934,7 +21889,6 @@
               <a:srgbClr val="E4E3DE"/>
             </a:solidFill>
           </a:ln>
-          <a:effectLst/>
           <a:effectLst>
             <a:outerShdw blurRad="90000" dist="38000" dir="5400000" rotWithShape="0">
               <a:srgbClr val="20242E">
@@ -22651,7 +22605,6 @@
               <a:srgbClr val="E4E3DE"/>
             </a:solidFill>
           </a:ln>
-          <a:effectLst/>
           <a:effectLst>
             <a:outerShdw blurRad="90000" dist="38000" dir="5400000" rotWithShape="0">
               <a:srgbClr val="20242E">
